--- a/data/포트폴리오_조영하.pptx
+++ b/data/포트폴리오_조영하.pptx
@@ -869,7 +869,7 @@
   <p:cSld>
     <p:spTree>
       <p:nvGrpSpPr>
-        <p:cNvPr id="62" name="Shape 62"/>
+        <p:cNvPr id="61" name="Shape 61"/>
         <p:cNvGrpSpPr/>
         <p:nvPr/>
       </p:nvGrpSpPr>
@@ -883,7 +883,7 @@
       </p:grpSpPr>
       <p:sp>
         <p:nvSpPr>
-          <p:cNvPr id="63" name="Google Shape;63;g3e65b57f852_1_14:notes"/>
+          <p:cNvPr id="62" name="Google Shape;62;g3e65b57f852_1_14:notes"/>
           <p:cNvSpPr/>
           <p:nvPr>
             <p:ph idx="2" type="sldImg"/>
@@ -928,7 +928,7 @@
       </p:sp>
       <p:sp>
         <p:nvSpPr>
-          <p:cNvPr id="64" name="Google Shape;64;g3e65b57f852_1_14:notes"/>
+          <p:cNvPr id="63" name="Google Shape;63;g3e65b57f852_1_14:notes"/>
           <p:cNvSpPr txBox="1"/>
           <p:nvPr>
             <p:ph idx="1" type="body"/>
@@ -971,7 +971,7 @@
       </p:sp>
       <p:sp>
         <p:nvSpPr>
-          <p:cNvPr id="65" name="Google Shape;65;g3e65b57f852_1_14:notes"/>
+          <p:cNvPr id="64" name="Google Shape;64;g3e65b57f852_1_14:notes"/>
           <p:cNvSpPr txBox="1"/>
           <p:nvPr>
             <p:ph idx="12" type="sldNum"/>
@@ -1026,7 +1026,7 @@
   <p:cSld>
     <p:spTree>
       <p:nvGrpSpPr>
-        <p:cNvPr id="90" name="Shape 90"/>
+        <p:cNvPr id="89" name="Shape 89"/>
         <p:cNvGrpSpPr/>
         <p:nvPr/>
       </p:nvGrpSpPr>
@@ -1040,7 +1040,7 @@
       </p:grpSpPr>
       <p:sp>
         <p:nvSpPr>
-          <p:cNvPr id="91" name="Google Shape;91;g3e65b57f852_1_58:notes"/>
+          <p:cNvPr id="90" name="Google Shape;90;g3e65b57f852_1_58:notes"/>
           <p:cNvSpPr/>
           <p:nvPr>
             <p:ph idx="2" type="sldImg"/>
@@ -1085,7 +1085,7 @@
       </p:sp>
       <p:sp>
         <p:nvSpPr>
-          <p:cNvPr id="92" name="Google Shape;92;g3e65b57f852_1_58:notes"/>
+          <p:cNvPr id="91" name="Google Shape;91;g3e65b57f852_1_58:notes"/>
           <p:cNvSpPr txBox="1"/>
           <p:nvPr>
             <p:ph idx="1" type="body"/>
@@ -1128,7 +1128,7 @@
       </p:sp>
       <p:sp>
         <p:nvSpPr>
-          <p:cNvPr id="93" name="Google Shape;93;g3e65b57f852_1_58:notes"/>
+          <p:cNvPr id="92" name="Google Shape;92;g3e65b57f852_1_58:notes"/>
           <p:cNvSpPr txBox="1"/>
           <p:nvPr>
             <p:ph idx="12" type="sldNum"/>
@@ -1183,7 +1183,7 @@
   <p:cSld>
     <p:spTree>
       <p:nvGrpSpPr>
-        <p:cNvPr id="118" name="Shape 118"/>
+        <p:cNvPr id="117" name="Shape 117"/>
         <p:cNvGrpSpPr/>
         <p:nvPr/>
       </p:nvGrpSpPr>
@@ -1197,7 +1197,7 @@
       </p:grpSpPr>
       <p:sp>
         <p:nvSpPr>
-          <p:cNvPr id="119" name="Google Shape;119;g3e65b57f852_1_85:notes"/>
+          <p:cNvPr id="118" name="Google Shape;118;g3e65b57f852_1_85:notes"/>
           <p:cNvSpPr/>
           <p:nvPr>
             <p:ph idx="2" type="sldImg"/>
@@ -1242,7 +1242,7 @@
       </p:sp>
       <p:sp>
         <p:nvSpPr>
-          <p:cNvPr id="120" name="Google Shape;120;g3e65b57f852_1_85:notes"/>
+          <p:cNvPr id="119" name="Google Shape;119;g3e65b57f852_1_85:notes"/>
           <p:cNvSpPr txBox="1"/>
           <p:nvPr>
             <p:ph idx="1" type="body"/>
@@ -1285,7 +1285,7 @@
       </p:sp>
       <p:sp>
         <p:nvSpPr>
-          <p:cNvPr id="121" name="Google Shape;121;g3e65b57f852_1_85:notes"/>
+          <p:cNvPr id="120" name="Google Shape;120;g3e65b57f852_1_85:notes"/>
           <p:cNvSpPr txBox="1"/>
           <p:nvPr>
             <p:ph idx="12" type="sldNum"/>
@@ -1340,7 +1340,7 @@
   <p:cSld>
     <p:spTree>
       <p:nvGrpSpPr>
-        <p:cNvPr id="168" name="Shape 168"/>
+        <p:cNvPr id="167" name="Shape 167"/>
         <p:cNvGrpSpPr/>
         <p:nvPr/>
       </p:nvGrpSpPr>
@@ -1354,7 +1354,7 @@
       </p:grpSpPr>
       <p:sp>
         <p:nvSpPr>
-          <p:cNvPr id="169" name="Google Shape;169;g3e65b57f852_1_115:notes"/>
+          <p:cNvPr id="168" name="Google Shape;168;g3e65b57f852_1_115:notes"/>
           <p:cNvSpPr/>
           <p:nvPr>
             <p:ph idx="2" type="sldImg"/>
@@ -1399,7 +1399,7 @@
       </p:sp>
       <p:sp>
         <p:nvSpPr>
-          <p:cNvPr id="170" name="Google Shape;170;g3e65b57f852_1_115:notes"/>
+          <p:cNvPr id="169" name="Google Shape;169;g3e65b57f852_1_115:notes"/>
           <p:cNvSpPr txBox="1"/>
           <p:nvPr>
             <p:ph idx="1" type="body"/>
@@ -1442,7 +1442,7 @@
       </p:sp>
       <p:sp>
         <p:nvSpPr>
-          <p:cNvPr id="171" name="Google Shape;171;g3e65b57f852_1_115:notes"/>
+          <p:cNvPr id="170" name="Google Shape;170;g3e65b57f852_1_115:notes"/>
           <p:cNvSpPr txBox="1"/>
           <p:nvPr>
             <p:ph idx="12" type="sldNum"/>
@@ -1497,7 +1497,7 @@
   <p:cSld>
     <p:spTree>
       <p:nvGrpSpPr>
-        <p:cNvPr id="183" name="Shape 183"/>
+        <p:cNvPr id="182" name="Shape 182"/>
         <p:cNvGrpSpPr/>
         <p:nvPr/>
       </p:nvGrpSpPr>
@@ -1511,7 +1511,7 @@
       </p:grpSpPr>
       <p:sp>
         <p:nvSpPr>
-          <p:cNvPr id="184" name="Google Shape;184;g3e65b57f852_1_135:notes"/>
+          <p:cNvPr id="183" name="Google Shape;183;g3e65b57f852_1_135:notes"/>
           <p:cNvSpPr/>
           <p:nvPr>
             <p:ph idx="2" type="sldImg"/>
@@ -1556,7 +1556,7 @@
       </p:sp>
       <p:sp>
         <p:nvSpPr>
-          <p:cNvPr id="185" name="Google Shape;185;g3e65b57f852_1_135:notes"/>
+          <p:cNvPr id="184" name="Google Shape;184;g3e65b57f852_1_135:notes"/>
           <p:cNvSpPr txBox="1"/>
           <p:nvPr>
             <p:ph idx="1" type="body"/>
@@ -1599,7 +1599,7 @@
       </p:sp>
       <p:sp>
         <p:nvSpPr>
-          <p:cNvPr id="186" name="Google Shape;186;g3e65b57f852_1_135:notes"/>
+          <p:cNvPr id="185" name="Google Shape;185;g3e65b57f852_1_135:notes"/>
           <p:cNvSpPr txBox="1"/>
           <p:nvPr>
             <p:ph idx="12" type="sldNum"/>
@@ -1654,7 +1654,7 @@
   <p:cSld>
     <p:spTree>
       <p:nvGrpSpPr>
-        <p:cNvPr id="193" name="Shape 193"/>
+        <p:cNvPr id="192" name="Shape 192"/>
         <p:cNvGrpSpPr/>
         <p:nvPr/>
       </p:nvGrpSpPr>
@@ -1668,7 +1668,7 @@
       </p:grpSpPr>
       <p:sp>
         <p:nvSpPr>
-          <p:cNvPr id="194" name="Google Shape;194;g3e65b57f852_1_150:notes"/>
+          <p:cNvPr id="193" name="Google Shape;193;g3e65b57f852_1_150:notes"/>
           <p:cNvSpPr/>
           <p:nvPr>
             <p:ph idx="2" type="sldImg"/>
@@ -1713,7 +1713,7 @@
       </p:sp>
       <p:sp>
         <p:nvSpPr>
-          <p:cNvPr id="195" name="Google Shape;195;g3e65b57f852_1_150:notes"/>
+          <p:cNvPr id="194" name="Google Shape;194;g3e65b57f852_1_150:notes"/>
           <p:cNvSpPr txBox="1"/>
           <p:nvPr>
             <p:ph idx="1" type="body"/>
@@ -1756,7 +1756,7 @@
       </p:sp>
       <p:sp>
         <p:nvSpPr>
-          <p:cNvPr id="196" name="Google Shape;196;g3e65b57f852_1_150:notes"/>
+          <p:cNvPr id="195" name="Google Shape;195;g3e65b57f852_1_150:notes"/>
           <p:cNvSpPr txBox="1"/>
           <p:nvPr>
             <p:ph idx="12" type="sldNum"/>
@@ -1811,7 +1811,7 @@
   <p:cSld>
     <p:spTree>
       <p:nvGrpSpPr>
-        <p:cNvPr id="223" name="Shape 223"/>
+        <p:cNvPr id="222" name="Shape 222"/>
         <p:cNvGrpSpPr/>
         <p:nvPr/>
       </p:nvGrpSpPr>
@@ -1825,7 +1825,7 @@
       </p:grpSpPr>
       <p:sp>
         <p:nvSpPr>
-          <p:cNvPr id="224" name="Google Shape;224;g3e65b57f852_1_182:notes"/>
+          <p:cNvPr id="223" name="Google Shape;223;g3e65b57f852_1_182:notes"/>
           <p:cNvSpPr/>
           <p:nvPr>
             <p:ph idx="2" type="sldImg"/>
@@ -1870,7 +1870,7 @@
       </p:sp>
       <p:sp>
         <p:nvSpPr>
-          <p:cNvPr id="225" name="Google Shape;225;g3e65b57f852_1_182:notes"/>
+          <p:cNvPr id="224" name="Google Shape;224;g3e65b57f852_1_182:notes"/>
           <p:cNvSpPr txBox="1"/>
           <p:nvPr>
             <p:ph idx="1" type="body"/>
@@ -1913,7 +1913,7 @@
       </p:sp>
       <p:sp>
         <p:nvSpPr>
-          <p:cNvPr id="226" name="Google Shape;226;g3e65b57f852_1_182:notes"/>
+          <p:cNvPr id="225" name="Google Shape;225;g3e65b57f852_1_182:notes"/>
           <p:cNvSpPr txBox="1"/>
           <p:nvPr>
             <p:ph idx="12" type="sldNum"/>
@@ -1968,7 +1968,7 @@
   <p:cSld>
     <p:spTree>
       <p:nvGrpSpPr>
-        <p:cNvPr id="260" name="Shape 260"/>
+        <p:cNvPr id="259" name="Shape 259"/>
         <p:cNvGrpSpPr/>
         <p:nvPr/>
       </p:nvGrpSpPr>
@@ -1982,7 +1982,7 @@
       </p:grpSpPr>
       <p:sp>
         <p:nvSpPr>
-          <p:cNvPr id="261" name="Google Shape;261;g3e65b57f852_1_222:notes"/>
+          <p:cNvPr id="260" name="Google Shape;260;g3e65b57f852_1_222:notes"/>
           <p:cNvSpPr/>
           <p:nvPr>
             <p:ph idx="2" type="sldImg"/>
@@ -2027,7 +2027,7 @@
       </p:sp>
       <p:sp>
         <p:nvSpPr>
-          <p:cNvPr id="262" name="Google Shape;262;g3e65b57f852_1_222:notes"/>
+          <p:cNvPr id="261" name="Google Shape;261;g3e65b57f852_1_222:notes"/>
           <p:cNvSpPr txBox="1"/>
           <p:nvPr>
             <p:ph idx="1" type="body"/>
@@ -2070,7 +2070,7 @@
       </p:sp>
       <p:sp>
         <p:nvSpPr>
-          <p:cNvPr id="263" name="Google Shape;263;g3e65b57f852_1_222:notes"/>
+          <p:cNvPr id="262" name="Google Shape;262;g3e65b57f852_1_222:notes"/>
           <p:cNvSpPr txBox="1"/>
           <p:nvPr>
             <p:ph idx="12" type="sldNum"/>
@@ -6888,8 +6888,8 @@
         </p:nvSpPr>
         <p:spPr>
           <a:xfrm>
-            <a:off x="640080" y="1554480"/>
-            <a:ext cx="7772400" cy="640080"/>
+            <a:off x="640075" y="1676124"/>
+            <a:ext cx="7772400" cy="1361700"/>
           </a:xfrm>
           <a:prstGeom prst="rect">
             <a:avLst/>
@@ -6920,7 +6920,7 @@
               <a:buNone/>
             </a:pPr>
             <a:r>
-              <a:rPr b="1" i="0" lang="ko" sz="3200" u="none" cap="none" strike="noStrike">
+              <a:rPr b="1" lang="ko" sz="3200">
                 <a:solidFill>
                   <a:srgbClr val="FFFFFF"/>
                 </a:solidFill>
@@ -6929,16 +6929,72 @@
                 <a:cs typeface="Arial Black"/>
                 <a:sym typeface="Arial Black"/>
               </a:rPr>
-              <a:t>본인 경력 및 직무 역량 소개</a:t>
-            </a:r>
-            <a:endParaRPr b="0" i="0" sz="3200" u="none" cap="none" strike="noStrike">
+              <a:t>Portfolio</a:t>
+            </a:r>
+            <a:endParaRPr b="1" i="0" sz="3200" u="none" cap="none" strike="noStrike">
               <a:solidFill>
-                <a:schemeClr val="dk1"/>
+                <a:srgbClr val="FFFFFF"/>
               </a:solidFill>
-              <a:latin typeface="Calibri"/>
-              <a:ea typeface="Calibri"/>
-              <a:cs typeface="Calibri"/>
-              <a:sym typeface="Calibri"/>
+              <a:latin typeface="Arial Black"/>
+              <a:ea typeface="Arial Black"/>
+              <a:cs typeface="Arial Black"/>
+              <a:sym typeface="Arial Black"/>
+            </a:endParaRPr>
+          </a:p>
+          <a:p>
+            <a:pPr indent="0" lvl="0" marL="0" marR="0" rtl="0" algn="l">
+              <a:spcBef>
+                <a:spcPts val="0"/>
+              </a:spcBef>
+              <a:spcAft>
+                <a:spcPts val="0"/>
+              </a:spcAft>
+              <a:buClr>
+                <a:srgbClr val="FFFFFF"/>
+              </a:buClr>
+              <a:buSzPts val="3200"/>
+              <a:buFont typeface="Arial Black"/>
+              <a:buNone/>
+            </a:pPr>
+            <a:r>
+              <a:t/>
+            </a:r>
+            <a:endParaRPr b="1" sz="1500">
+              <a:solidFill>
+                <a:srgbClr val="FFFFFF"/>
+              </a:solidFill>
+              <a:latin typeface="Arial Black"/>
+              <a:ea typeface="Arial Black"/>
+              <a:cs typeface="Arial Black"/>
+              <a:sym typeface="Arial Black"/>
+            </a:endParaRPr>
+          </a:p>
+          <a:p>
+            <a:pPr indent="0" lvl="0" marL="0" marR="0" rtl="0" algn="l">
+              <a:spcBef>
+                <a:spcPts val="0"/>
+              </a:spcBef>
+              <a:spcAft>
+                <a:spcPts val="0"/>
+              </a:spcAft>
+              <a:buClr>
+                <a:srgbClr val="FFFFFF"/>
+              </a:buClr>
+              <a:buSzPts val="3200"/>
+              <a:buFont typeface="Arial Black"/>
+              <a:buNone/>
+            </a:pPr>
+            <a:r>
+              <a:t/>
+            </a:r>
+            <a:endParaRPr b="1" sz="1500">
+              <a:solidFill>
+                <a:srgbClr val="FFFFFF"/>
+              </a:solidFill>
+              <a:latin typeface="Arial Black"/>
+              <a:ea typeface="Arial Black"/>
+              <a:cs typeface="Arial Black"/>
+              <a:sym typeface="Arial Black"/>
             </a:endParaRPr>
           </a:p>
         </p:txBody>
@@ -7137,6 +7193,19 @@
               <a:buNone/>
             </a:pPr>
             <a:r>
+              <a:rPr b="0" i="0" lang="ko" sz="1100" u="sng" cap="none" strike="noStrike">
+                <a:solidFill>
+                  <a:schemeClr val="hlink"/>
+                </a:solidFill>
+                <a:latin typeface="Arial"/>
+                <a:ea typeface="Arial"/>
+                <a:cs typeface="Arial"/>
+                <a:sym typeface="Arial"/>
+                <a:hlinkClick r:id="rId5"/>
+              </a:rPr>
+              <a:t>hawe66@kaist.ac.kr</a:t>
+            </a:r>
+            <a:r>
               <a:rPr b="0" i="0" lang="ko" sz="1100" u="none" cap="none" strike="noStrike">
                 <a:solidFill>
                   <a:srgbClr val="90A4AE"/>
@@ -7146,101 +7215,59 @@
                 <a:cs typeface="Arial"/>
                 <a:sym typeface="Arial"/>
               </a:rPr>
-              <a:t>hawe66@kaist.ac.kr  |  github.com/hawe66</a:t>
+              <a:t>  |  </a:t>
+            </a:r>
+            <a:r>
+              <a:rPr b="0" i="0" lang="ko" sz="1100" u="sng" cap="none" strike="noStrike">
+                <a:solidFill>
+                  <a:schemeClr val="hlink"/>
+                </a:solidFill>
+                <a:latin typeface="Arial"/>
+                <a:ea typeface="Arial"/>
+                <a:cs typeface="Arial"/>
+                <a:sym typeface="Arial"/>
+                <a:hlinkClick r:id="rId6"/>
+              </a:rPr>
+              <a:t>github.com/hawe66</a:t>
+            </a:r>
+            <a:r>
+              <a:rPr b="0" i="0" lang="ko" sz="1100" u="none" cap="none" strike="noStrike">
+                <a:solidFill>
+                  <a:srgbClr val="90A4AE"/>
+                </a:solidFill>
+                <a:latin typeface="Arial"/>
+                <a:ea typeface="Arial"/>
+                <a:cs typeface="Arial"/>
+                <a:sym typeface="Arial"/>
+              </a:rPr>
+              <a:t> | </a:t>
+            </a:r>
+            <a:r>
+              <a:rPr b="0" i="0" lang="ko" sz="1100" u="sng" cap="none" strike="noStrike">
+                <a:solidFill>
+                  <a:schemeClr val="hlink"/>
+                </a:solidFill>
+                <a:latin typeface="Arial"/>
+                <a:ea typeface="Arial"/>
+                <a:cs typeface="Arial"/>
+                <a:sym typeface="Arial"/>
+                <a:hlinkClick r:id="rId7"/>
+              </a:rPr>
+              <a:t>https://hawe66.github.io/</a:t>
+            </a:r>
+            <a:r>
+              <a:rPr b="0" i="0" lang="ko" sz="1100" u="none" cap="none" strike="noStrike">
+                <a:solidFill>
+                  <a:srgbClr val="90A4AE"/>
+                </a:solidFill>
+                <a:latin typeface="Arial"/>
+                <a:ea typeface="Arial"/>
+                <a:cs typeface="Arial"/>
+                <a:sym typeface="Arial"/>
+              </a:rPr>
+              <a:t> </a:t>
             </a:r>
             <a:endParaRPr b="0" i="0" sz="1800" u="none" cap="none" strike="noStrike">
-              <a:solidFill>
-                <a:schemeClr val="dk1"/>
-              </a:solidFill>
-              <a:latin typeface="Calibri"/>
-              <a:ea typeface="Calibri"/>
-              <a:cs typeface="Calibri"/>
-              <a:sym typeface="Calibri"/>
-            </a:endParaRPr>
-          </a:p>
-        </p:txBody>
-      </p:sp>
-      <p:sp>
-        <p:nvSpPr>
-          <p:cNvPr id="61" name="Google Shape;61;p14"/>
-          <p:cNvSpPr/>
-          <p:nvPr/>
-        </p:nvSpPr>
-        <p:spPr>
-          <a:xfrm>
-            <a:off x="5486400" y="3840480"/>
-            <a:ext cx="3200400" cy="731520"/>
-          </a:xfrm>
-          <a:prstGeom prst="rect">
-            <a:avLst/>
-          </a:prstGeom>
-          <a:noFill/>
-          <a:ln>
-            <a:noFill/>
-          </a:ln>
-        </p:spPr>
-        <p:txBody>
-          <a:bodyPr anchorCtr="0" anchor="ctr" bIns="0" lIns="0" spcFirstLastPara="1" rIns="0" wrap="square" tIns="0">
-            <a:noAutofit/>
-          </a:bodyPr>
-          <a:lstStyle/>
-          <a:p>
-            <a:pPr indent="0" lvl="0" marL="0" marR="0" rtl="0" algn="r">
-              <a:spcBef>
-                <a:spcPts val="0"/>
-              </a:spcBef>
-              <a:spcAft>
-                <a:spcPts val="0"/>
-              </a:spcAft>
-              <a:buClr>
-                <a:srgbClr val="90A4AE"/>
-              </a:buClr>
-              <a:buSzPts val="1200"/>
-              <a:buFont typeface="Arial"/>
-              <a:buNone/>
-            </a:pPr>
-            <a:r>
-              <a:rPr lang="ko" sz="1200">
-                <a:solidFill>
-                  <a:srgbClr val="90A4AE"/>
-                </a:solidFill>
-              </a:rPr>
-              <a:t>SK 텔레콤</a:t>
-            </a:r>
-            <a:endParaRPr b="0" i="0" sz="1200" u="none" cap="none" strike="noStrike">
-              <a:solidFill>
-                <a:schemeClr val="dk1"/>
-              </a:solidFill>
-              <a:latin typeface="Calibri"/>
-              <a:ea typeface="Calibri"/>
-              <a:cs typeface="Calibri"/>
-              <a:sym typeface="Calibri"/>
-            </a:endParaRPr>
-          </a:p>
-          <a:p>
-            <a:pPr indent="0" lvl="0" marL="0" marR="0" rtl="0" algn="r">
-              <a:spcBef>
-                <a:spcPts val="0"/>
-              </a:spcBef>
-              <a:spcAft>
-                <a:spcPts val="0"/>
-              </a:spcAft>
-              <a:buClr>
-                <a:srgbClr val="90A4AE"/>
-              </a:buClr>
-              <a:buSzPts val="1200"/>
-              <a:buFont typeface="Arial"/>
-              <a:buNone/>
-            </a:pPr>
-            <a:r>
-              <a:rPr lang="ko" sz="1200">
-                <a:solidFill>
-                  <a:srgbClr val="90A4AE"/>
-                </a:solidFill>
-              </a:rPr>
-              <a:t>초대형 AI 모델 학습·최적화 엔지니어</a:t>
-            </a:r>
-            <a:endParaRPr b="0" i="0" sz="1200" u="none" cap="none" strike="noStrike">
               <a:solidFill>
                 <a:schemeClr val="dk1"/>
               </a:solidFill>
@@ -7272,7 +7299,7 @@
     </p:bg>
     <p:spTree>
       <p:nvGrpSpPr>
-        <p:cNvPr id="66" name="Shape 66"/>
+        <p:cNvPr id="65" name="Shape 65"/>
         <p:cNvGrpSpPr/>
         <p:nvPr/>
       </p:nvGrpSpPr>
@@ -7286,7 +7313,7 @@
       </p:grpSpPr>
       <p:sp>
         <p:nvSpPr>
-          <p:cNvPr id="67" name="Google Shape;67;p15"/>
+          <p:cNvPr id="66" name="Google Shape;66;p15"/>
           <p:cNvSpPr/>
           <p:nvPr/>
         </p:nvSpPr>
@@ -7349,7 +7376,7 @@
       </p:sp>
       <p:sp>
         <p:nvSpPr>
-          <p:cNvPr id="68" name="Google Shape;68;p15"/>
+          <p:cNvPr id="67" name="Google Shape;67;p15"/>
           <p:cNvSpPr/>
           <p:nvPr/>
         </p:nvSpPr>
@@ -7432,7 +7459,7 @@
       </p:sp>
       <p:sp>
         <p:nvSpPr>
-          <p:cNvPr id="69" name="Google Shape;69;p15"/>
+          <p:cNvPr id="68" name="Google Shape;68;p15"/>
           <p:cNvSpPr/>
           <p:nvPr/>
         </p:nvSpPr>
@@ -7475,7 +7502,7 @@
       </p:sp>
       <p:sp>
         <p:nvSpPr>
-          <p:cNvPr id="70" name="Google Shape;70;p15"/>
+          <p:cNvPr id="69" name="Google Shape;69;p15"/>
           <p:cNvSpPr/>
           <p:nvPr/>
         </p:nvSpPr>
@@ -7524,7 +7551,7 @@
       </p:sp>
       <p:sp>
         <p:nvSpPr>
-          <p:cNvPr id="71" name="Google Shape;71;p15"/>
+          <p:cNvPr id="70" name="Google Shape;70;p15"/>
           <p:cNvSpPr/>
           <p:nvPr/>
         </p:nvSpPr>
@@ -7624,7 +7651,7 @@
       </p:sp>
       <p:sp>
         <p:nvSpPr>
-          <p:cNvPr id="72" name="Google Shape;72;p15"/>
+          <p:cNvPr id="71" name="Google Shape;71;p15"/>
           <p:cNvSpPr/>
           <p:nvPr/>
         </p:nvSpPr>
@@ -7724,7 +7751,7 @@
       </p:sp>
       <p:sp>
         <p:nvSpPr>
-          <p:cNvPr id="73" name="Google Shape;73;p15"/>
+          <p:cNvPr id="72" name="Google Shape;72;p15"/>
           <p:cNvSpPr/>
           <p:nvPr/>
         </p:nvSpPr>
@@ -7787,7 +7814,7 @@
       </p:sp>
       <p:sp>
         <p:nvSpPr>
-          <p:cNvPr id="74" name="Google Shape;74;p15"/>
+          <p:cNvPr id="73" name="Google Shape;73;p15"/>
           <p:cNvSpPr/>
           <p:nvPr/>
         </p:nvSpPr>
@@ -7836,7 +7863,7 @@
       </p:sp>
       <p:sp>
         <p:nvSpPr>
-          <p:cNvPr id="75" name="Google Shape;75;p15"/>
+          <p:cNvPr id="74" name="Google Shape;74;p15"/>
           <p:cNvSpPr/>
           <p:nvPr/>
         </p:nvSpPr>
@@ -7936,7 +7963,7 @@
       </p:sp>
       <p:sp>
         <p:nvSpPr>
-          <p:cNvPr id="76" name="Google Shape;76;p15"/>
+          <p:cNvPr id="75" name="Google Shape;75;p15"/>
           <p:cNvSpPr/>
           <p:nvPr/>
         </p:nvSpPr>
@@ -8036,7 +8063,7 @@
       </p:sp>
       <p:sp>
         <p:nvSpPr>
-          <p:cNvPr id="77" name="Google Shape;77;p15"/>
+          <p:cNvPr id="76" name="Google Shape;76;p15"/>
           <p:cNvSpPr/>
           <p:nvPr/>
         </p:nvSpPr>
@@ -8099,7 +8126,7 @@
       </p:sp>
       <p:sp>
         <p:nvSpPr>
-          <p:cNvPr id="78" name="Google Shape;78;p15"/>
+          <p:cNvPr id="77" name="Google Shape;77;p15"/>
           <p:cNvSpPr/>
           <p:nvPr/>
         </p:nvSpPr>
@@ -8148,7 +8175,7 @@
       </p:sp>
       <p:sp>
         <p:nvSpPr>
-          <p:cNvPr id="79" name="Google Shape;79;p15"/>
+          <p:cNvPr id="78" name="Google Shape;78;p15"/>
           <p:cNvSpPr/>
           <p:nvPr/>
         </p:nvSpPr>
@@ -8211,7 +8238,7 @@
       </p:sp>
       <p:sp>
         <p:nvSpPr>
-          <p:cNvPr id="80" name="Google Shape;80;p15"/>
+          <p:cNvPr id="79" name="Google Shape;79;p15"/>
           <p:cNvSpPr/>
           <p:nvPr/>
         </p:nvSpPr>
@@ -8319,7 +8346,7 @@
       </p:sp>
       <p:sp>
         <p:nvSpPr>
-          <p:cNvPr id="81" name="Google Shape;81;p15"/>
+          <p:cNvPr id="80" name="Google Shape;80;p15"/>
           <p:cNvSpPr/>
           <p:nvPr/>
         </p:nvSpPr>
@@ -8382,7 +8409,7 @@
       </p:sp>
       <p:sp>
         <p:nvSpPr>
-          <p:cNvPr id="82" name="Google Shape;82;p15"/>
+          <p:cNvPr id="81" name="Google Shape;81;p15"/>
           <p:cNvSpPr/>
           <p:nvPr/>
         </p:nvSpPr>
@@ -8431,7 +8458,7 @@
       </p:sp>
       <p:sp>
         <p:nvSpPr>
-          <p:cNvPr id="83" name="Google Shape;83;p15"/>
+          <p:cNvPr id="82" name="Google Shape;82;p15"/>
           <p:cNvSpPr/>
           <p:nvPr/>
         </p:nvSpPr>
@@ -8531,7 +8558,7 @@
       </p:sp>
       <p:sp>
         <p:nvSpPr>
-          <p:cNvPr id="84" name="Google Shape;84;p15"/>
+          <p:cNvPr id="83" name="Google Shape;83;p15"/>
           <p:cNvSpPr/>
           <p:nvPr/>
         </p:nvSpPr>
@@ -8631,7 +8658,7 @@
       </p:sp>
       <p:sp>
         <p:nvSpPr>
-          <p:cNvPr id="85" name="Google Shape;85;p15"/>
+          <p:cNvPr id="84" name="Google Shape;84;p15"/>
           <p:cNvSpPr/>
           <p:nvPr/>
         </p:nvSpPr>
@@ -8694,7 +8721,7 @@
       </p:sp>
       <p:sp>
         <p:nvSpPr>
-          <p:cNvPr id="86" name="Google Shape;86;p15"/>
+          <p:cNvPr id="85" name="Google Shape;85;p15"/>
           <p:cNvSpPr/>
           <p:nvPr/>
         </p:nvSpPr>
@@ -8743,7 +8770,7 @@
       </p:sp>
       <p:sp>
         <p:nvSpPr>
-          <p:cNvPr id="87" name="Google Shape;87;p15"/>
+          <p:cNvPr id="86" name="Google Shape;86;p15"/>
           <p:cNvSpPr/>
           <p:nvPr/>
         </p:nvSpPr>
@@ -8843,7 +8870,7 @@
       </p:sp>
       <p:sp>
         <p:nvSpPr>
-          <p:cNvPr id="88" name="Google Shape;88;p15"/>
+          <p:cNvPr id="87" name="Google Shape;87;p15"/>
           <p:cNvSpPr/>
           <p:nvPr/>
         </p:nvSpPr>
@@ -8943,7 +8970,7 @@
       </p:sp>
       <p:sp>
         <p:nvSpPr>
-          <p:cNvPr id="89" name="Google Shape;89;p15"/>
+          <p:cNvPr id="88" name="Google Shape;88;p15"/>
           <p:cNvSpPr/>
           <p:nvPr/>
         </p:nvSpPr>
@@ -9024,7 +9051,7 @@
     </p:bg>
     <p:spTree>
       <p:nvGrpSpPr>
-        <p:cNvPr id="94" name="Shape 94"/>
+        <p:cNvPr id="93" name="Shape 93"/>
         <p:cNvGrpSpPr/>
         <p:nvPr/>
       </p:nvGrpSpPr>
@@ -9038,7 +9065,7 @@
       </p:grpSpPr>
       <p:sp>
         <p:nvSpPr>
-          <p:cNvPr id="95" name="Google Shape;95;p16"/>
+          <p:cNvPr id="94" name="Google Shape;94;p16"/>
           <p:cNvSpPr/>
           <p:nvPr/>
         </p:nvSpPr>
@@ -9137,7 +9164,7 @@
       </p:sp>
       <p:sp>
         <p:nvSpPr>
-          <p:cNvPr id="96" name="Google Shape;96;p16"/>
+          <p:cNvPr id="95" name="Google Shape;95;p16"/>
           <p:cNvSpPr/>
           <p:nvPr/>
         </p:nvSpPr>
@@ -9180,7 +9207,7 @@
       </p:sp>
       <p:sp>
         <p:nvSpPr>
-          <p:cNvPr id="97" name="Google Shape;97;p16"/>
+          <p:cNvPr id="96" name="Google Shape;96;p16"/>
           <p:cNvSpPr/>
           <p:nvPr/>
         </p:nvSpPr>
@@ -9255,7 +9282,7 @@
       </p:sp>
       <p:sp>
         <p:nvSpPr>
-          <p:cNvPr id="98" name="Google Shape;98;p16"/>
+          <p:cNvPr id="97" name="Google Shape;97;p16"/>
           <p:cNvSpPr/>
           <p:nvPr/>
         </p:nvSpPr>
@@ -9318,7 +9345,7 @@
       </p:sp>
       <p:sp>
         <p:nvSpPr>
-          <p:cNvPr id="99" name="Google Shape;99;p16"/>
+          <p:cNvPr id="98" name="Google Shape;98;p16"/>
           <p:cNvSpPr/>
           <p:nvPr/>
         </p:nvSpPr>
@@ -9381,7 +9408,7 @@
       </p:sp>
       <p:sp>
         <p:nvSpPr>
-          <p:cNvPr id="100" name="Google Shape;100;p16"/>
+          <p:cNvPr id="99" name="Google Shape;99;p16"/>
           <p:cNvSpPr/>
           <p:nvPr/>
         </p:nvSpPr>
@@ -9424,7 +9451,7 @@
       </p:sp>
       <p:sp>
         <p:nvSpPr>
-          <p:cNvPr id="101" name="Google Shape;101;p16"/>
+          <p:cNvPr id="100" name="Google Shape;100;p16"/>
           <p:cNvSpPr/>
           <p:nvPr/>
         </p:nvSpPr>
@@ -9489,7 +9516,7 @@
       </p:sp>
       <p:sp>
         <p:nvSpPr>
-          <p:cNvPr id="102" name="Google Shape;102;p16"/>
+          <p:cNvPr id="101" name="Google Shape;101;p16"/>
           <p:cNvSpPr/>
           <p:nvPr/>
         </p:nvSpPr>
@@ -9589,7 +9616,7 @@
       </p:sp>
       <p:sp>
         <p:nvSpPr>
-          <p:cNvPr id="103" name="Google Shape;103;p16"/>
+          <p:cNvPr id="102" name="Google Shape;102;p16"/>
           <p:cNvSpPr/>
           <p:nvPr/>
         </p:nvSpPr>
@@ -9632,7 +9659,7 @@
       </p:sp>
       <p:sp>
         <p:nvSpPr>
-          <p:cNvPr id="104" name="Google Shape;104;p16"/>
+          <p:cNvPr id="103" name="Google Shape;103;p16"/>
           <p:cNvSpPr/>
           <p:nvPr/>
         </p:nvSpPr>
@@ -9697,7 +9724,7 @@
       </p:sp>
       <p:sp>
         <p:nvSpPr>
-          <p:cNvPr id="105" name="Google Shape;105;p16"/>
+          <p:cNvPr id="104" name="Google Shape;104;p16"/>
           <p:cNvSpPr/>
           <p:nvPr/>
         </p:nvSpPr>
@@ -9797,7 +9824,7 @@
       </p:sp>
       <p:sp>
         <p:nvSpPr>
-          <p:cNvPr id="106" name="Google Shape;106;p16"/>
+          <p:cNvPr id="105" name="Google Shape;105;p16"/>
           <p:cNvSpPr/>
           <p:nvPr/>
         </p:nvSpPr>
@@ -9840,7 +9867,7 @@
       </p:sp>
       <p:sp>
         <p:nvSpPr>
-          <p:cNvPr id="107" name="Google Shape;107;p16"/>
+          <p:cNvPr id="106" name="Google Shape;106;p16"/>
           <p:cNvSpPr/>
           <p:nvPr/>
         </p:nvSpPr>
@@ -9905,7 +9932,7 @@
       </p:sp>
       <p:sp>
         <p:nvSpPr>
-          <p:cNvPr id="108" name="Google Shape;108;p16"/>
+          <p:cNvPr id="107" name="Google Shape;107;p16"/>
           <p:cNvSpPr/>
           <p:nvPr/>
         </p:nvSpPr>
@@ -10005,7 +10032,7 @@
       </p:sp>
       <p:sp>
         <p:nvSpPr>
-          <p:cNvPr id="109" name="Google Shape;109;p16"/>
+          <p:cNvPr id="108" name="Google Shape;108;p16"/>
           <p:cNvSpPr/>
           <p:nvPr/>
         </p:nvSpPr>
@@ -10048,7 +10075,7 @@
       </p:sp>
       <p:sp>
         <p:nvSpPr>
-          <p:cNvPr id="110" name="Google Shape;110;p16"/>
+          <p:cNvPr id="109" name="Google Shape;109;p16"/>
           <p:cNvSpPr/>
           <p:nvPr/>
         </p:nvSpPr>
@@ -10091,7 +10118,7 @@
       </p:sp>
       <p:sp>
         <p:nvSpPr>
-          <p:cNvPr id="111" name="Google Shape;111;p16"/>
+          <p:cNvPr id="110" name="Google Shape;110;p16"/>
           <p:cNvSpPr/>
           <p:nvPr/>
         </p:nvSpPr>
@@ -10166,7 +10193,7 @@
       </p:sp>
       <p:sp>
         <p:nvSpPr>
-          <p:cNvPr id="112" name="Google Shape;112;p16"/>
+          <p:cNvPr id="111" name="Google Shape;111;p16"/>
           <p:cNvSpPr/>
           <p:nvPr/>
         </p:nvSpPr>
@@ -10209,7 +10236,7 @@
       </p:sp>
       <p:sp>
         <p:nvSpPr>
-          <p:cNvPr id="113" name="Google Shape;113;p16"/>
+          <p:cNvPr id="112" name="Google Shape;112;p16"/>
           <p:cNvSpPr/>
           <p:nvPr/>
         </p:nvSpPr>
@@ -10252,7 +10279,7 @@
       </p:sp>
       <p:sp>
         <p:nvSpPr>
-          <p:cNvPr id="114" name="Google Shape;114;p16"/>
+          <p:cNvPr id="113" name="Google Shape;113;p16"/>
           <p:cNvSpPr/>
           <p:nvPr/>
         </p:nvSpPr>
@@ -10327,7 +10354,7 @@
       </p:sp>
       <p:pic>
         <p:nvPicPr>
-          <p:cNvPr id="115" name="Google Shape;115;p16"/>
+          <p:cNvPr id="114" name="Google Shape;114;p16"/>
           <p:cNvPicPr preferRelativeResize="0"/>
           <p:nvPr/>
         </p:nvPicPr>
@@ -10354,7 +10381,7 @@
       </p:pic>
       <p:pic>
         <p:nvPicPr>
-          <p:cNvPr id="116" name="Google Shape;116;p16"/>
+          <p:cNvPr id="115" name="Google Shape;115;p16"/>
           <p:cNvPicPr preferRelativeResize="0"/>
           <p:nvPr/>
         </p:nvPicPr>
@@ -10382,7 +10409,7 @@
       </p:pic>
       <p:pic>
         <p:nvPicPr>
-          <p:cNvPr id="117" name="Google Shape;117;p16"/>
+          <p:cNvPr id="116" name="Google Shape;116;p16"/>
           <p:cNvPicPr preferRelativeResize="0"/>
           <p:nvPr/>
         </p:nvPicPr>
@@ -10428,7 +10455,7 @@
     </p:bg>
     <p:spTree>
       <p:nvGrpSpPr>
-        <p:cNvPr id="122" name="Shape 122"/>
+        <p:cNvPr id="121" name="Shape 121"/>
         <p:cNvGrpSpPr/>
         <p:nvPr/>
       </p:nvGrpSpPr>
@@ -10442,7 +10469,7 @@
       </p:grpSpPr>
       <p:sp>
         <p:nvSpPr>
-          <p:cNvPr id="123" name="Google Shape;123;p17"/>
+          <p:cNvPr id="122" name="Google Shape;122;p17"/>
           <p:cNvSpPr/>
           <p:nvPr/>
         </p:nvSpPr>
@@ -10505,7 +10532,7 @@
       </p:sp>
       <p:sp>
         <p:nvSpPr>
-          <p:cNvPr id="124" name="Google Shape;124;p17"/>
+          <p:cNvPr id="123" name="Google Shape;123;p17"/>
           <p:cNvSpPr/>
           <p:nvPr/>
         </p:nvSpPr>
@@ -10568,7 +10595,7 @@
       </p:sp>
       <p:sp>
         <p:nvSpPr>
-          <p:cNvPr id="125" name="Google Shape;125;p17"/>
+          <p:cNvPr id="124" name="Google Shape;124;p17"/>
           <p:cNvSpPr/>
           <p:nvPr/>
         </p:nvSpPr>
@@ -10631,7 +10658,7 @@
       </p:sp>
       <p:sp>
         <p:nvSpPr>
-          <p:cNvPr id="126" name="Google Shape;126;p17"/>
+          <p:cNvPr id="125" name="Google Shape;125;p17"/>
           <p:cNvSpPr/>
           <p:nvPr/>
         </p:nvSpPr>
@@ -10680,7 +10707,7 @@
       </p:sp>
       <p:sp>
         <p:nvSpPr>
-          <p:cNvPr id="127" name="Google Shape;127;p17"/>
+          <p:cNvPr id="126" name="Google Shape;126;p17"/>
           <p:cNvSpPr/>
           <p:nvPr/>
         </p:nvSpPr>
@@ -10743,7 +10770,7 @@
       </p:sp>
       <p:sp>
         <p:nvSpPr>
-          <p:cNvPr id="128" name="Google Shape;128;p17"/>
+          <p:cNvPr id="127" name="Google Shape;127;p17"/>
           <p:cNvSpPr/>
           <p:nvPr/>
         </p:nvSpPr>
@@ -10792,7 +10819,7 @@
       </p:sp>
       <p:sp>
         <p:nvSpPr>
-          <p:cNvPr id="129" name="Google Shape;129;p17"/>
+          <p:cNvPr id="128" name="Google Shape;128;p17"/>
           <p:cNvSpPr/>
           <p:nvPr/>
         </p:nvSpPr>
@@ -10855,7 +10882,7 @@
       </p:sp>
       <p:sp>
         <p:nvSpPr>
-          <p:cNvPr id="130" name="Google Shape;130;p17"/>
+          <p:cNvPr id="129" name="Google Shape;129;p17"/>
           <p:cNvSpPr/>
           <p:nvPr/>
         </p:nvSpPr>
@@ -10955,7 +10982,7 @@
       </p:sp>
       <p:sp>
         <p:nvSpPr>
-          <p:cNvPr id="131" name="Google Shape;131;p17"/>
+          <p:cNvPr id="130" name="Google Shape;130;p17"/>
           <p:cNvSpPr/>
           <p:nvPr/>
         </p:nvSpPr>
@@ -11004,7 +11031,7 @@
       </p:sp>
       <p:sp>
         <p:nvSpPr>
-          <p:cNvPr id="132" name="Google Shape;132;p17"/>
+          <p:cNvPr id="131" name="Google Shape;131;p17"/>
           <p:cNvSpPr/>
           <p:nvPr/>
         </p:nvSpPr>
@@ -11079,7 +11106,7 @@
       </p:sp>
       <p:sp>
         <p:nvSpPr>
-          <p:cNvPr id="133" name="Google Shape;133;p17"/>
+          <p:cNvPr id="132" name="Google Shape;132;p17"/>
           <p:cNvSpPr/>
           <p:nvPr/>
         </p:nvSpPr>
@@ -11142,7 +11169,7 @@
       </p:sp>
       <p:sp>
         <p:nvSpPr>
-          <p:cNvPr id="134" name="Google Shape;134;p17"/>
+          <p:cNvPr id="133" name="Google Shape;133;p17"/>
           <p:cNvSpPr/>
           <p:nvPr/>
         </p:nvSpPr>
@@ -11191,7 +11218,7 @@
       </p:sp>
       <p:sp>
         <p:nvSpPr>
-          <p:cNvPr id="135" name="Google Shape;135;p17"/>
+          <p:cNvPr id="134" name="Google Shape;134;p17"/>
           <p:cNvSpPr/>
           <p:nvPr/>
         </p:nvSpPr>
@@ -11254,7 +11281,7 @@
       </p:sp>
       <p:sp>
         <p:nvSpPr>
-          <p:cNvPr id="136" name="Google Shape;136;p17"/>
+          <p:cNvPr id="135" name="Google Shape;135;p17"/>
           <p:cNvSpPr/>
           <p:nvPr/>
         </p:nvSpPr>
@@ -11354,7 +11381,7 @@
       </p:sp>
       <p:sp>
         <p:nvSpPr>
-          <p:cNvPr id="137" name="Google Shape;137;p17"/>
+          <p:cNvPr id="136" name="Google Shape;136;p17"/>
           <p:cNvSpPr/>
           <p:nvPr/>
         </p:nvSpPr>
@@ -11403,7 +11430,7 @@
       </p:sp>
       <p:sp>
         <p:nvSpPr>
-          <p:cNvPr id="138" name="Google Shape;138;p17"/>
+          <p:cNvPr id="137" name="Google Shape;137;p17"/>
           <p:cNvSpPr/>
           <p:nvPr/>
         </p:nvSpPr>
@@ -11478,7 +11505,7 @@
       </p:sp>
       <p:sp>
         <p:nvSpPr>
-          <p:cNvPr id="139" name="Google Shape;139;p17"/>
+          <p:cNvPr id="138" name="Google Shape;138;p17"/>
           <p:cNvSpPr/>
           <p:nvPr/>
         </p:nvSpPr>
@@ -11541,7 +11568,7 @@
       </p:sp>
       <p:sp>
         <p:nvSpPr>
-          <p:cNvPr id="140" name="Google Shape;140;p17"/>
+          <p:cNvPr id="139" name="Google Shape;139;p17"/>
           <p:cNvSpPr/>
           <p:nvPr/>
         </p:nvSpPr>
@@ -11671,7 +11698,7 @@
       </p:sp>
       <p:sp>
         <p:nvSpPr>
-          <p:cNvPr id="141" name="Google Shape;141;p17"/>
+          <p:cNvPr id="140" name="Google Shape;140;p17"/>
           <p:cNvSpPr txBox="1"/>
           <p:nvPr/>
         </p:nvSpPr>
@@ -11808,7 +11835,7 @@
       </p:sp>
       <p:pic>
         <p:nvPicPr>
-          <p:cNvPr id="142" name="Google Shape;142;p17"/>
+          <p:cNvPr id="141" name="Google Shape;141;p17"/>
           <p:cNvPicPr preferRelativeResize="0"/>
           <p:nvPr/>
         </p:nvPicPr>
@@ -11836,7 +11863,7 @@
       </p:pic>
       <p:pic>
         <p:nvPicPr>
-          <p:cNvPr id="143" name="Google Shape;143;p17"/>
+          <p:cNvPr id="142" name="Google Shape;142;p17"/>
           <p:cNvPicPr preferRelativeResize="0"/>
           <p:nvPr/>
         </p:nvPicPr>
@@ -11863,7 +11890,7 @@
       </p:pic>
       <p:pic>
         <p:nvPicPr>
-          <p:cNvPr id="144" name="Google Shape;144;p17"/>
+          <p:cNvPr id="143" name="Google Shape;143;p17"/>
           <p:cNvPicPr preferRelativeResize="0"/>
           <p:nvPr/>
         </p:nvPicPr>
@@ -11891,7 +11918,7 @@
       </p:pic>
       <p:sp>
         <p:nvSpPr>
-          <p:cNvPr id="145" name="Google Shape;145;p17"/>
+          <p:cNvPr id="144" name="Google Shape;144;p17"/>
           <p:cNvSpPr/>
           <p:nvPr/>
         </p:nvSpPr>
@@ -11943,7 +11970,7 @@
       </p:sp>
       <p:sp>
         <p:nvSpPr>
-          <p:cNvPr id="146" name="Google Shape;146;p17"/>
+          <p:cNvPr id="145" name="Google Shape;145;p17"/>
           <p:cNvSpPr/>
           <p:nvPr/>
         </p:nvSpPr>
@@ -11995,7 +12022,7 @@
       </p:sp>
       <p:sp>
         <p:nvSpPr>
-          <p:cNvPr id="147" name="Google Shape;147;p17"/>
+          <p:cNvPr id="146" name="Google Shape;146;p17"/>
           <p:cNvSpPr/>
           <p:nvPr/>
         </p:nvSpPr>
@@ -12038,7 +12065,7 @@
       </p:sp>
       <p:sp>
         <p:nvSpPr>
-          <p:cNvPr id="148" name="Google Shape;148;p17"/>
+          <p:cNvPr id="147" name="Google Shape;147;p17"/>
           <p:cNvSpPr/>
           <p:nvPr/>
         </p:nvSpPr>
@@ -12081,7 +12108,7 @@
       </p:sp>
       <p:pic>
         <p:nvPicPr>
-          <p:cNvPr descr="라인, 도표, 원이(가) 표시된 사진&#10;&#10;자동 생성된 설명" id="149" name="Google Shape;149;p17"/>
+          <p:cNvPr descr="라인, 도표, 원이(가) 표시된 사진&#10;&#10;자동 생성된 설명" id="148" name="Google Shape;148;p17"/>
           <p:cNvPicPr preferRelativeResize="0"/>
           <p:nvPr/>
         </p:nvPicPr>
@@ -12108,7 +12135,7 @@
       </p:pic>
       <p:cxnSp>
         <p:nvCxnSpPr>
-          <p:cNvPr id="150" name="Google Shape;150;p17"/>
+          <p:cNvPr id="149" name="Google Shape;149;p17"/>
           <p:cNvCxnSpPr/>
           <p:nvPr/>
         </p:nvCxnSpPr>
@@ -12134,7 +12161,7 @@
       </p:cxnSp>
       <p:sp>
         <p:nvSpPr>
-          <p:cNvPr id="151" name="Google Shape;151;p17"/>
+          <p:cNvPr id="150" name="Google Shape;150;p17"/>
           <p:cNvSpPr txBox="1"/>
           <p:nvPr/>
         </p:nvSpPr>
@@ -12188,7 +12215,7 @@
       </p:sp>
       <p:pic>
         <p:nvPicPr>
-          <p:cNvPr id="152" name="Google Shape;152;p17"/>
+          <p:cNvPr id="151" name="Google Shape;151;p17"/>
           <p:cNvPicPr preferRelativeResize="0"/>
           <p:nvPr/>
         </p:nvPicPr>
@@ -12216,7 +12243,7 @@
       </p:pic>
       <p:sp>
         <p:nvSpPr>
-          <p:cNvPr id="153" name="Google Shape;153;p17"/>
+          <p:cNvPr id="152" name="Google Shape;152;p17"/>
           <p:cNvSpPr/>
           <p:nvPr/>
         </p:nvSpPr>
@@ -12268,9 +12295,9 @@
       </p:sp>
       <p:cxnSp>
         <p:nvCxnSpPr>
-          <p:cNvPr id="154" name="Google Shape;154;p17"/>
+          <p:cNvPr id="153" name="Google Shape;153;p17"/>
           <p:cNvCxnSpPr>
-            <a:stCxn id="153" idx="4"/>
+            <a:stCxn id="152" idx="4"/>
           </p:cNvCxnSpPr>
           <p:nvPr/>
         </p:nvCxnSpPr>
@@ -12296,7 +12323,7 @@
       </p:cxnSp>
       <p:sp>
         <p:nvSpPr>
-          <p:cNvPr id="155" name="Google Shape;155;p17"/>
+          <p:cNvPr id="154" name="Google Shape;154;p17"/>
           <p:cNvSpPr txBox="1"/>
           <p:nvPr/>
         </p:nvSpPr>
@@ -12555,7 +12582,7 @@
       </p:sp>
       <p:pic>
         <p:nvPicPr>
-          <p:cNvPr descr="스크린샷, 직사각형, 사각형, 픽셀이(가) 표시된 사진&#10;&#10;자동 생성된 설명" id="156" name="Google Shape;156;p17"/>
+          <p:cNvPr descr="스크린샷, 직사각형, 사각형, 픽셀이(가) 표시된 사진&#10;&#10;자동 생성된 설명" id="155" name="Google Shape;155;p17"/>
           <p:cNvPicPr preferRelativeResize="0"/>
           <p:nvPr/>
         </p:nvPicPr>
@@ -12582,7 +12609,7 @@
       </p:pic>
       <p:cxnSp>
         <p:nvCxnSpPr>
-          <p:cNvPr id="157" name="Google Shape;157;p17"/>
+          <p:cNvPr id="156" name="Google Shape;156;p17"/>
           <p:cNvCxnSpPr/>
           <p:nvPr/>
         </p:nvCxnSpPr>
@@ -12608,7 +12635,7 @@
       </p:cxnSp>
       <p:sp>
         <p:nvSpPr>
-          <p:cNvPr id="158" name="Google Shape;158;p17"/>
+          <p:cNvPr id="157" name="Google Shape;157;p17"/>
           <p:cNvSpPr/>
           <p:nvPr/>
         </p:nvSpPr>
@@ -12791,7 +12818,7 @@
       </p:sp>
       <p:pic>
         <p:nvPicPr>
-          <p:cNvPr descr="스크린샷, 직사각형, 사각형, 픽셀이(가) 표시된 사진&#10;&#10;자동 생성된 설명" id="159" name="Google Shape;159;p17"/>
+          <p:cNvPr descr="스크린샷, 직사각형, 사각형, 픽셀이(가) 표시된 사진&#10;&#10;자동 생성된 설명" id="158" name="Google Shape;158;p17"/>
           <p:cNvPicPr preferRelativeResize="0"/>
           <p:nvPr/>
         </p:nvPicPr>
@@ -12818,7 +12845,7 @@
       </p:pic>
       <p:sp>
         <p:nvSpPr>
-          <p:cNvPr id="160" name="Google Shape;160;p17"/>
+          <p:cNvPr id="159" name="Google Shape;159;p17"/>
           <p:cNvSpPr/>
           <p:nvPr/>
         </p:nvSpPr>
@@ -12869,7 +12896,7 @@
       </p:sp>
       <p:cxnSp>
         <p:nvCxnSpPr>
-          <p:cNvPr id="161" name="Google Shape;161;p17"/>
+          <p:cNvPr id="160" name="Google Shape;160;p17"/>
           <p:cNvCxnSpPr/>
           <p:nvPr/>
         </p:nvCxnSpPr>
@@ -12895,7 +12922,7 @@
       </p:cxnSp>
       <p:sp>
         <p:nvSpPr>
-          <p:cNvPr id="162" name="Google Shape;162;p17"/>
+          <p:cNvPr id="161" name="Google Shape;161;p17"/>
           <p:cNvSpPr/>
           <p:nvPr/>
         </p:nvSpPr>
@@ -13078,7 +13105,7 @@
       </p:sp>
       <p:sp>
         <p:nvSpPr>
-          <p:cNvPr id="163" name="Google Shape;163;p17"/>
+          <p:cNvPr id="162" name="Google Shape;162;p17"/>
           <p:cNvSpPr/>
           <p:nvPr/>
         </p:nvSpPr>
@@ -13206,7 +13233,7 @@
       </p:sp>
       <p:sp>
         <p:nvSpPr>
-          <p:cNvPr id="164" name="Google Shape;164;p17"/>
+          <p:cNvPr id="163" name="Google Shape;163;p17"/>
           <p:cNvSpPr txBox="1"/>
           <p:nvPr/>
         </p:nvSpPr>
@@ -13264,7 +13291,7 @@
       </p:sp>
       <p:pic>
         <p:nvPicPr>
-          <p:cNvPr id="165" name="Google Shape;165;p17"/>
+          <p:cNvPr id="164" name="Google Shape;164;p17"/>
           <p:cNvPicPr preferRelativeResize="0"/>
           <p:nvPr/>
         </p:nvPicPr>
@@ -13292,7 +13319,7 @@
       </p:pic>
       <p:sp>
         <p:nvSpPr>
-          <p:cNvPr id="166" name="Google Shape;166;p17"/>
+          <p:cNvPr id="165" name="Google Shape;165;p17"/>
           <p:cNvSpPr txBox="1"/>
           <p:nvPr/>
         </p:nvSpPr>
@@ -13350,7 +13377,7 @@
       </p:sp>
       <p:sp>
         <p:nvSpPr>
-          <p:cNvPr id="167" name="Google Shape;167;p17"/>
+          <p:cNvPr id="166" name="Google Shape;166;p17"/>
           <p:cNvSpPr txBox="1"/>
           <p:nvPr/>
         </p:nvSpPr>
@@ -13426,7 +13453,7 @@
     </p:bg>
     <p:spTree>
       <p:nvGrpSpPr>
-        <p:cNvPr id="172" name="Shape 172"/>
+        <p:cNvPr id="171" name="Shape 171"/>
         <p:cNvGrpSpPr/>
         <p:nvPr/>
       </p:nvGrpSpPr>
@@ -13440,7 +13467,7 @@
       </p:grpSpPr>
       <p:sp>
         <p:nvSpPr>
-          <p:cNvPr id="173" name="Google Shape;173;p18"/>
+          <p:cNvPr id="172" name="Google Shape;172;p18"/>
           <p:cNvSpPr/>
           <p:nvPr/>
         </p:nvSpPr>
@@ -13503,7 +13530,7 @@
       </p:sp>
       <p:sp>
         <p:nvSpPr>
-          <p:cNvPr id="174" name="Google Shape;174;p18"/>
+          <p:cNvPr id="173" name="Google Shape;173;p18"/>
           <p:cNvSpPr/>
           <p:nvPr/>
         </p:nvSpPr>
@@ -13586,7 +13613,7 @@
       </p:sp>
       <p:sp>
         <p:nvSpPr>
-          <p:cNvPr id="175" name="Google Shape;175;p18"/>
+          <p:cNvPr id="174" name="Google Shape;174;p18"/>
           <p:cNvSpPr/>
           <p:nvPr/>
         </p:nvSpPr>
@@ -13629,7 +13656,7 @@
       </p:sp>
       <p:sp>
         <p:nvSpPr>
-          <p:cNvPr id="176" name="Google Shape;176;p18"/>
+          <p:cNvPr id="175" name="Google Shape;175;p18"/>
           <p:cNvSpPr/>
           <p:nvPr/>
         </p:nvSpPr>
@@ -13692,7 +13719,7 @@
       </p:sp>
       <p:sp>
         <p:nvSpPr>
-          <p:cNvPr id="177" name="Google Shape;177;p18"/>
+          <p:cNvPr id="176" name="Google Shape;176;p18"/>
           <p:cNvSpPr/>
           <p:nvPr/>
         </p:nvSpPr>
@@ -13811,7 +13838,7 @@
       </p:sp>
       <p:sp>
         <p:nvSpPr>
-          <p:cNvPr id="178" name="Google Shape;178;p18"/>
+          <p:cNvPr id="177" name="Google Shape;177;p18"/>
           <p:cNvSpPr/>
           <p:nvPr/>
         </p:nvSpPr>
@@ -13874,7 +13901,7 @@
       </p:sp>
       <p:sp>
         <p:nvSpPr>
-          <p:cNvPr id="179" name="Google Shape;179;p18"/>
+          <p:cNvPr id="178" name="Google Shape;178;p18"/>
           <p:cNvSpPr/>
           <p:nvPr/>
         </p:nvSpPr>
@@ -14027,7 +14054,7 @@
       </p:sp>
       <p:sp>
         <p:nvSpPr>
-          <p:cNvPr id="180" name="Google Shape;180;p18"/>
+          <p:cNvPr id="179" name="Google Shape;179;p18"/>
           <p:cNvSpPr/>
           <p:nvPr/>
         </p:nvSpPr>
@@ -14090,7 +14117,7 @@
       </p:sp>
       <p:pic>
         <p:nvPicPr>
-          <p:cNvPr id="181" name="Google Shape;181;p18"/>
+          <p:cNvPr id="180" name="Google Shape;180;p18"/>
           <p:cNvPicPr preferRelativeResize="0"/>
           <p:nvPr/>
         </p:nvPicPr>
@@ -14117,7 +14144,7 @@
       </p:pic>
       <p:pic>
         <p:nvPicPr>
-          <p:cNvPr id="182" name="Google Shape;182;p18"/>
+          <p:cNvPr id="181" name="Google Shape;181;p18"/>
           <p:cNvPicPr preferRelativeResize="0"/>
           <p:nvPr/>
         </p:nvPicPr>
@@ -14163,7 +14190,7 @@
     </p:bg>
     <p:spTree>
       <p:nvGrpSpPr>
-        <p:cNvPr id="187" name="Shape 187"/>
+        <p:cNvPr id="186" name="Shape 186"/>
         <p:cNvGrpSpPr/>
         <p:nvPr/>
       </p:nvGrpSpPr>
@@ -14177,7 +14204,7 @@
       </p:grpSpPr>
       <p:sp>
         <p:nvSpPr>
-          <p:cNvPr id="188" name="Google Shape;188;p19"/>
+          <p:cNvPr id="187" name="Google Shape;187;p19"/>
           <p:cNvSpPr/>
           <p:nvPr/>
         </p:nvSpPr>
@@ -14240,7 +14267,7 @@
       </p:sp>
       <p:sp>
         <p:nvSpPr>
-          <p:cNvPr id="189" name="Google Shape;189;p19"/>
+          <p:cNvPr id="188" name="Google Shape;188;p19"/>
           <p:cNvSpPr/>
           <p:nvPr/>
         </p:nvSpPr>
@@ -14311,7 +14338,7 @@
       </p:sp>
       <p:sp>
         <p:nvSpPr>
-          <p:cNvPr id="190" name="Google Shape;190;p19"/>
+          <p:cNvPr id="189" name="Google Shape;189;p19"/>
           <p:cNvSpPr/>
           <p:nvPr/>
         </p:nvSpPr>
@@ -14485,7 +14512,7 @@
       </p:sp>
       <p:sp>
         <p:nvSpPr>
-          <p:cNvPr id="191" name="Google Shape;191;p19"/>
+          <p:cNvPr id="190" name="Google Shape;190;p19"/>
           <p:cNvSpPr/>
           <p:nvPr/>
         </p:nvSpPr>
@@ -14548,7 +14575,7 @@
       </p:sp>
       <p:pic>
         <p:nvPicPr>
-          <p:cNvPr id="192" name="Google Shape;192;p19"/>
+          <p:cNvPr id="191" name="Google Shape;191;p19"/>
           <p:cNvPicPr preferRelativeResize="0"/>
           <p:nvPr/>
         </p:nvPicPr>
@@ -14594,7 +14621,7 @@
     </p:bg>
     <p:spTree>
       <p:nvGrpSpPr>
-        <p:cNvPr id="197" name="Shape 197"/>
+        <p:cNvPr id="196" name="Shape 196"/>
         <p:cNvGrpSpPr/>
         <p:nvPr/>
       </p:nvGrpSpPr>
@@ -14608,7 +14635,7 @@
       </p:grpSpPr>
       <p:sp>
         <p:nvSpPr>
-          <p:cNvPr id="198" name="Google Shape;198;p20"/>
+          <p:cNvPr id="197" name="Google Shape;197;p20"/>
           <p:cNvSpPr/>
           <p:nvPr/>
         </p:nvSpPr>
@@ -14671,7 +14698,7 @@
       </p:sp>
       <p:sp>
         <p:nvSpPr>
-          <p:cNvPr id="199" name="Google Shape;199;p20"/>
+          <p:cNvPr id="198" name="Google Shape;198;p20"/>
           <p:cNvSpPr/>
           <p:nvPr/>
         </p:nvSpPr>
@@ -14734,7 +14761,7 @@
       </p:sp>
       <p:sp>
         <p:nvSpPr>
-          <p:cNvPr id="200" name="Google Shape;200;p20"/>
+          <p:cNvPr id="199" name="Google Shape;199;p20"/>
           <p:cNvSpPr/>
           <p:nvPr/>
         </p:nvSpPr>
@@ -14797,7 +14824,7 @@
       </p:sp>
       <p:sp>
         <p:nvSpPr>
-          <p:cNvPr id="201" name="Google Shape;201;p20"/>
+          <p:cNvPr id="200" name="Google Shape;200;p20"/>
           <p:cNvSpPr/>
           <p:nvPr/>
         </p:nvSpPr>
@@ -14934,7 +14961,7 @@
       </p:sp>
       <p:sp>
         <p:nvSpPr>
-          <p:cNvPr id="202" name="Google Shape;202;p20"/>
+          <p:cNvPr id="201" name="Google Shape;201;p20"/>
           <p:cNvSpPr/>
           <p:nvPr/>
         </p:nvSpPr>
@@ -14977,7 +15004,7 @@
       </p:sp>
       <p:sp>
         <p:nvSpPr>
-          <p:cNvPr id="203" name="Google Shape;203;p20"/>
+          <p:cNvPr id="202" name="Google Shape;202;p20"/>
           <p:cNvSpPr/>
           <p:nvPr/>
         </p:nvSpPr>
@@ -15077,7 +15104,7 @@
       </p:sp>
       <p:sp>
         <p:nvSpPr>
-          <p:cNvPr id="204" name="Google Shape;204;p20"/>
+          <p:cNvPr id="203" name="Google Shape;203;p20"/>
           <p:cNvSpPr/>
           <p:nvPr/>
         </p:nvSpPr>
@@ -15120,7 +15147,7 @@
       </p:sp>
       <p:sp>
         <p:nvSpPr>
-          <p:cNvPr id="205" name="Google Shape;205;p20"/>
+          <p:cNvPr id="204" name="Google Shape;204;p20"/>
           <p:cNvSpPr/>
           <p:nvPr/>
         </p:nvSpPr>
@@ -15257,7 +15284,7 @@
       </p:sp>
       <p:sp>
         <p:nvSpPr>
-          <p:cNvPr id="206" name="Google Shape;206;p20"/>
+          <p:cNvPr id="205" name="Google Shape;205;p20"/>
           <p:cNvSpPr/>
           <p:nvPr/>
         </p:nvSpPr>
@@ -15320,7 +15347,7 @@
       </p:sp>
       <p:sp>
         <p:nvSpPr>
-          <p:cNvPr id="207" name="Google Shape;207;p20"/>
+          <p:cNvPr id="206" name="Google Shape;206;p20"/>
           <p:cNvSpPr/>
           <p:nvPr/>
         </p:nvSpPr>
@@ -15363,7 +15390,7 @@
       </p:sp>
       <p:sp>
         <p:nvSpPr>
-          <p:cNvPr id="208" name="Google Shape;208;p20"/>
+          <p:cNvPr id="207" name="Google Shape;207;p20"/>
           <p:cNvSpPr/>
           <p:nvPr/>
         </p:nvSpPr>
@@ -15463,7 +15490,7 @@
       </p:sp>
       <p:sp>
         <p:nvSpPr>
-          <p:cNvPr id="209" name="Google Shape;209;p20"/>
+          <p:cNvPr id="208" name="Google Shape;208;p20"/>
           <p:cNvSpPr/>
           <p:nvPr/>
         </p:nvSpPr>
@@ -15506,7 +15533,7 @@
       </p:sp>
       <p:sp>
         <p:nvSpPr>
-          <p:cNvPr id="210" name="Google Shape;210;p20"/>
+          <p:cNvPr id="209" name="Google Shape;209;p20"/>
           <p:cNvSpPr/>
           <p:nvPr/>
         </p:nvSpPr>
@@ -15643,7 +15670,7 @@
       </p:sp>
       <p:sp>
         <p:nvSpPr>
-          <p:cNvPr id="211" name="Google Shape;211;p20"/>
+          <p:cNvPr id="210" name="Google Shape;210;p20"/>
           <p:cNvSpPr/>
           <p:nvPr/>
         </p:nvSpPr>
@@ -15706,7 +15733,7 @@
       </p:sp>
       <p:sp>
         <p:nvSpPr>
-          <p:cNvPr id="212" name="Google Shape;212;p20"/>
+          <p:cNvPr id="211" name="Google Shape;211;p20"/>
           <p:cNvSpPr/>
           <p:nvPr/>
         </p:nvSpPr>
@@ -15749,7 +15776,7 @@
       </p:sp>
       <p:sp>
         <p:nvSpPr>
-          <p:cNvPr id="213" name="Google Shape;213;p20"/>
+          <p:cNvPr id="212" name="Google Shape;212;p20"/>
           <p:cNvSpPr/>
           <p:nvPr/>
         </p:nvSpPr>
@@ -15849,7 +15876,7 @@
       </p:sp>
       <p:sp>
         <p:nvSpPr>
-          <p:cNvPr id="214" name="Google Shape;214;p20"/>
+          <p:cNvPr id="213" name="Google Shape;213;p20"/>
           <p:cNvSpPr/>
           <p:nvPr/>
         </p:nvSpPr>
@@ -15912,7 +15939,7 @@
       </p:sp>
       <p:sp>
         <p:nvSpPr>
-          <p:cNvPr id="215" name="Google Shape;215;p20"/>
+          <p:cNvPr id="214" name="Google Shape;214;p20"/>
           <p:cNvSpPr/>
           <p:nvPr/>
         </p:nvSpPr>
@@ -15975,7 +16002,7 @@
       </p:sp>
       <p:sp>
         <p:nvSpPr>
-          <p:cNvPr id="216" name="Google Shape;216;p20"/>
+          <p:cNvPr id="215" name="Google Shape;215;p20"/>
           <p:cNvSpPr/>
           <p:nvPr/>
         </p:nvSpPr>
@@ -16018,7 +16045,7 @@
       </p:sp>
       <p:sp>
         <p:nvSpPr>
-          <p:cNvPr id="217" name="Google Shape;217;p20"/>
+          <p:cNvPr id="216" name="Google Shape;216;p20"/>
           <p:cNvSpPr/>
           <p:nvPr/>
         </p:nvSpPr>
@@ -16081,7 +16108,7 @@
       </p:sp>
       <p:cxnSp>
         <p:nvCxnSpPr>
-          <p:cNvPr id="218" name="Google Shape;218;p20"/>
+          <p:cNvPr id="217" name="Google Shape;217;p20"/>
           <p:cNvCxnSpPr/>
           <p:nvPr/>
         </p:nvCxnSpPr>
@@ -16107,7 +16134,7 @@
       </p:cxnSp>
       <p:sp>
         <p:nvSpPr>
-          <p:cNvPr id="219" name="Google Shape;219;p20"/>
+          <p:cNvPr id="218" name="Google Shape;218;p20"/>
           <p:cNvSpPr/>
           <p:nvPr/>
         </p:nvSpPr>
@@ -16170,7 +16197,7 @@
       </p:sp>
       <p:sp>
         <p:nvSpPr>
-          <p:cNvPr id="220" name="Google Shape;220;p20"/>
+          <p:cNvPr id="219" name="Google Shape;219;p20"/>
           <p:cNvSpPr/>
           <p:nvPr/>
         </p:nvSpPr>
@@ -16233,7 +16260,7 @@
       </p:sp>
       <p:pic>
         <p:nvPicPr>
-          <p:cNvPr id="221" name="Google Shape;221;p20" title="kgshow.gif"/>
+          <p:cNvPr id="220" name="Google Shape;220;p20" title="kgshow.gif"/>
           <p:cNvPicPr preferRelativeResize="0"/>
           <p:nvPr/>
         </p:nvPicPr>
@@ -16261,7 +16288,7 @@
       </p:pic>
       <p:pic>
         <p:nvPicPr>
-          <p:cNvPr id="222" name="Google Shape;222;p20" title="answer_fu.gif"/>
+          <p:cNvPr id="221" name="Google Shape;221;p20" title="answer_fu.gif"/>
           <p:cNvPicPr preferRelativeResize="0"/>
           <p:nvPr/>
         </p:nvPicPr>
@@ -16307,7 +16334,7 @@
     </p:bg>
     <p:spTree>
       <p:nvGrpSpPr>
-        <p:cNvPr id="227" name="Shape 227"/>
+        <p:cNvPr id="226" name="Shape 226"/>
         <p:cNvGrpSpPr/>
         <p:nvPr/>
       </p:nvGrpSpPr>
@@ -16321,7 +16348,7 @@
       </p:grpSpPr>
       <p:sp>
         <p:nvSpPr>
-          <p:cNvPr id="228" name="Google Shape;228;p21"/>
+          <p:cNvPr id="227" name="Google Shape;227;p21"/>
           <p:cNvSpPr/>
           <p:nvPr/>
         </p:nvSpPr>
@@ -16384,7 +16411,7 @@
       </p:sp>
       <p:sp>
         <p:nvSpPr>
-          <p:cNvPr id="229" name="Google Shape;229;p21"/>
+          <p:cNvPr id="228" name="Google Shape;228;p21"/>
           <p:cNvSpPr/>
           <p:nvPr/>
         </p:nvSpPr>
@@ -16455,7 +16482,7 @@
       </p:sp>
       <p:sp>
         <p:nvSpPr>
-          <p:cNvPr id="230" name="Google Shape;230;p21"/>
+          <p:cNvPr id="229" name="Google Shape;229;p21"/>
           <p:cNvSpPr/>
           <p:nvPr/>
         </p:nvSpPr>
@@ -16498,7 +16525,7 @@
       </p:sp>
       <p:sp>
         <p:nvSpPr>
-          <p:cNvPr id="231" name="Google Shape;231;p21"/>
+          <p:cNvPr id="230" name="Google Shape;230;p21"/>
           <p:cNvSpPr/>
           <p:nvPr/>
         </p:nvSpPr>
@@ -16547,7 +16574,7 @@
       </p:sp>
       <p:sp>
         <p:nvSpPr>
-          <p:cNvPr id="232" name="Google Shape;232;p21"/>
+          <p:cNvPr id="231" name="Google Shape;231;p21"/>
           <p:cNvSpPr/>
           <p:nvPr/>
         </p:nvSpPr>
@@ -16610,7 +16637,7 @@
       </p:sp>
       <p:sp>
         <p:nvSpPr>
-          <p:cNvPr id="233" name="Google Shape;233;p21"/>
+          <p:cNvPr id="232" name="Google Shape;232;p21"/>
           <p:cNvSpPr/>
           <p:nvPr/>
         </p:nvSpPr>
@@ -16710,7 +16737,7 @@
       </p:sp>
       <p:sp>
         <p:nvSpPr>
-          <p:cNvPr id="234" name="Google Shape;234;p21"/>
+          <p:cNvPr id="233" name="Google Shape;233;p21"/>
           <p:cNvSpPr/>
           <p:nvPr/>
         </p:nvSpPr>
@@ -16847,7 +16874,7 @@
       </p:sp>
       <p:sp>
         <p:nvSpPr>
-          <p:cNvPr id="235" name="Google Shape;235;p21"/>
+          <p:cNvPr id="234" name="Google Shape;234;p21"/>
           <p:cNvSpPr/>
           <p:nvPr/>
         </p:nvSpPr>
@@ -16896,7 +16923,7 @@
       </p:sp>
       <p:sp>
         <p:nvSpPr>
-          <p:cNvPr id="236" name="Google Shape;236;p21"/>
+          <p:cNvPr id="235" name="Google Shape;235;p21"/>
           <p:cNvSpPr/>
           <p:nvPr/>
         </p:nvSpPr>
@@ -16959,7 +16986,7 @@
       </p:sp>
       <p:sp>
         <p:nvSpPr>
-          <p:cNvPr id="237" name="Google Shape;237;p21"/>
+          <p:cNvPr id="236" name="Google Shape;236;p21"/>
           <p:cNvSpPr/>
           <p:nvPr/>
         </p:nvSpPr>
@@ -17059,7 +17086,7 @@
       </p:sp>
       <p:sp>
         <p:nvSpPr>
-          <p:cNvPr id="238" name="Google Shape;238;p21"/>
+          <p:cNvPr id="237" name="Google Shape;237;p21"/>
           <p:cNvSpPr/>
           <p:nvPr/>
         </p:nvSpPr>
@@ -17196,7 +17223,7 @@
       </p:sp>
       <p:sp>
         <p:nvSpPr>
-          <p:cNvPr id="239" name="Google Shape;239;p21"/>
+          <p:cNvPr id="238" name="Google Shape;238;p21"/>
           <p:cNvSpPr/>
           <p:nvPr/>
         </p:nvSpPr>
@@ -17239,7 +17266,7 @@
       </p:sp>
       <p:sp>
         <p:nvSpPr>
-          <p:cNvPr id="240" name="Google Shape;240;p21"/>
+          <p:cNvPr id="239" name="Google Shape;239;p21"/>
           <p:cNvSpPr/>
           <p:nvPr/>
         </p:nvSpPr>
@@ -17302,7 +17329,7 @@
       </p:sp>
       <p:sp>
         <p:nvSpPr>
-          <p:cNvPr id="241" name="Google Shape;241;p21"/>
+          <p:cNvPr id="240" name="Google Shape;240;p21"/>
           <p:cNvSpPr/>
           <p:nvPr/>
         </p:nvSpPr>
@@ -17345,7 +17372,7 @@
       </p:sp>
       <p:sp>
         <p:nvSpPr>
-          <p:cNvPr id="242" name="Google Shape;242;p21"/>
+          <p:cNvPr id="241" name="Google Shape;241;p21"/>
           <p:cNvSpPr/>
           <p:nvPr/>
         </p:nvSpPr>
@@ -17408,7 +17435,7 @@
       </p:sp>
       <p:sp>
         <p:nvSpPr>
-          <p:cNvPr id="243" name="Google Shape;243;p21"/>
+          <p:cNvPr id="242" name="Google Shape;242;p21"/>
           <p:cNvSpPr/>
           <p:nvPr/>
         </p:nvSpPr>
@@ -17457,7 +17484,7 @@
       </p:sp>
       <p:sp>
         <p:nvSpPr>
-          <p:cNvPr id="244" name="Google Shape;244;p21"/>
+          <p:cNvPr id="243" name="Google Shape;243;p21"/>
           <p:cNvSpPr/>
           <p:nvPr/>
         </p:nvSpPr>
@@ -17520,7 +17547,7 @@
       </p:sp>
       <p:sp>
         <p:nvSpPr>
-          <p:cNvPr id="245" name="Google Shape;245;p21"/>
+          <p:cNvPr id="244" name="Google Shape;244;p21"/>
           <p:cNvSpPr/>
           <p:nvPr/>
         </p:nvSpPr>
@@ -17569,7 +17596,7 @@
       </p:sp>
       <p:sp>
         <p:nvSpPr>
-          <p:cNvPr id="246" name="Google Shape;246;p21"/>
+          <p:cNvPr id="245" name="Google Shape;245;p21"/>
           <p:cNvSpPr/>
           <p:nvPr/>
         </p:nvSpPr>
@@ -17632,7 +17659,7 @@
       </p:sp>
       <p:sp>
         <p:nvSpPr>
-          <p:cNvPr id="247" name="Google Shape;247;p21"/>
+          <p:cNvPr id="246" name="Google Shape;246;p21"/>
           <p:cNvSpPr/>
           <p:nvPr/>
         </p:nvSpPr>
@@ -17681,7 +17708,7 @@
       </p:sp>
       <p:sp>
         <p:nvSpPr>
-          <p:cNvPr id="248" name="Google Shape;248;p21"/>
+          <p:cNvPr id="247" name="Google Shape;247;p21"/>
           <p:cNvSpPr/>
           <p:nvPr/>
         </p:nvSpPr>
@@ -17744,7 +17771,7 @@
       </p:sp>
       <p:sp>
         <p:nvSpPr>
-          <p:cNvPr id="249" name="Google Shape;249;p21"/>
+          <p:cNvPr id="248" name="Google Shape;248;p21"/>
           <p:cNvSpPr/>
           <p:nvPr/>
         </p:nvSpPr>
@@ -17793,7 +17820,7 @@
       </p:sp>
       <p:sp>
         <p:nvSpPr>
-          <p:cNvPr id="250" name="Google Shape;250;p21"/>
+          <p:cNvPr id="249" name="Google Shape;249;p21"/>
           <p:cNvSpPr/>
           <p:nvPr/>
         </p:nvSpPr>
@@ -17856,7 +17883,7 @@
       </p:sp>
       <p:sp>
         <p:nvSpPr>
-          <p:cNvPr id="251" name="Google Shape;251;p21"/>
+          <p:cNvPr id="250" name="Google Shape;250;p21"/>
           <p:cNvSpPr/>
           <p:nvPr/>
         </p:nvSpPr>
@@ -17919,7 +17946,7 @@
       </p:sp>
       <p:sp>
         <p:nvSpPr>
-          <p:cNvPr id="252" name="Google Shape;252;p21"/>
+          <p:cNvPr id="251" name="Google Shape;251;p21"/>
           <p:cNvSpPr/>
           <p:nvPr/>
         </p:nvSpPr>
@@ -17982,7 +18009,7 @@
       </p:sp>
       <p:sp>
         <p:nvSpPr>
-          <p:cNvPr id="253" name="Google Shape;253;p21"/>
+          <p:cNvPr id="252" name="Google Shape;252;p21"/>
           <p:cNvSpPr/>
           <p:nvPr/>
         </p:nvSpPr>
@@ -18045,7 +18072,7 @@
       </p:sp>
       <p:sp>
         <p:nvSpPr>
-          <p:cNvPr id="254" name="Google Shape;254;p21"/>
+          <p:cNvPr id="253" name="Google Shape;253;p21"/>
           <p:cNvSpPr/>
           <p:nvPr/>
         </p:nvSpPr>
@@ -18108,7 +18135,7 @@
       </p:sp>
       <p:sp>
         <p:nvSpPr>
-          <p:cNvPr id="255" name="Google Shape;255;p21"/>
+          <p:cNvPr id="254" name="Google Shape;254;p21"/>
           <p:cNvSpPr/>
           <p:nvPr/>
         </p:nvSpPr>
@@ -18151,7 +18178,7 @@
       </p:sp>
       <p:sp>
         <p:nvSpPr>
-          <p:cNvPr id="256" name="Google Shape;256;p21"/>
+          <p:cNvPr id="255" name="Google Shape;255;p21"/>
           <p:cNvSpPr/>
           <p:nvPr/>
         </p:nvSpPr>
@@ -18288,7 +18315,7 @@
       </p:sp>
       <p:sp>
         <p:nvSpPr>
-          <p:cNvPr id="257" name="Google Shape;257;p21"/>
+          <p:cNvPr id="256" name="Google Shape;256;p21"/>
           <p:cNvSpPr/>
           <p:nvPr/>
         </p:nvSpPr>
@@ -18351,7 +18378,7 @@
       </p:sp>
       <p:sp>
         <p:nvSpPr>
-          <p:cNvPr id="258" name="Google Shape;258;p21"/>
+          <p:cNvPr id="257" name="Google Shape;257;p21"/>
           <p:cNvSpPr/>
           <p:nvPr/>
         </p:nvSpPr>
@@ -18414,7 +18441,7 @@
       </p:sp>
       <p:sp>
         <p:nvSpPr>
-          <p:cNvPr id="259" name="Google Shape;259;p21"/>
+          <p:cNvPr id="258" name="Google Shape;258;p21"/>
           <p:cNvSpPr/>
           <p:nvPr/>
         </p:nvSpPr>
@@ -18495,7 +18522,7 @@
     </p:bg>
     <p:spTree>
       <p:nvGrpSpPr>
-        <p:cNvPr id="264" name="Shape 264"/>
+        <p:cNvPr id="263" name="Shape 263"/>
         <p:cNvGrpSpPr/>
         <p:nvPr/>
       </p:nvGrpSpPr>
@@ -18509,7 +18536,7 @@
       </p:grpSpPr>
       <p:sp>
         <p:nvSpPr>
-          <p:cNvPr id="265" name="Google Shape;265;p22"/>
+          <p:cNvPr id="264" name="Google Shape;264;p22"/>
           <p:cNvSpPr/>
           <p:nvPr/>
         </p:nvSpPr>
@@ -18572,7 +18599,7 @@
       </p:sp>
       <p:sp>
         <p:nvSpPr>
-          <p:cNvPr id="266" name="Google Shape;266;p22"/>
+          <p:cNvPr id="265" name="Google Shape;265;p22"/>
           <p:cNvSpPr/>
           <p:nvPr/>
         </p:nvSpPr>
@@ -18643,7 +18670,7 @@
       </p:sp>
       <p:sp>
         <p:nvSpPr>
-          <p:cNvPr id="267" name="Google Shape;267;p22"/>
+          <p:cNvPr id="266" name="Google Shape;266;p22"/>
           <p:cNvSpPr/>
           <p:nvPr/>
         </p:nvSpPr>
@@ -18686,7 +18713,7 @@
       </p:sp>
       <p:sp>
         <p:nvSpPr>
-          <p:cNvPr id="268" name="Google Shape;268;p22"/>
+          <p:cNvPr id="267" name="Google Shape;267;p22"/>
           <p:cNvSpPr/>
           <p:nvPr/>
         </p:nvSpPr>
@@ -18735,7 +18762,7 @@
       </p:sp>
       <p:sp>
         <p:nvSpPr>
-          <p:cNvPr id="269" name="Google Shape;269;p22"/>
+          <p:cNvPr id="268" name="Google Shape;268;p22"/>
           <p:cNvSpPr/>
           <p:nvPr/>
         </p:nvSpPr>
@@ -18835,7 +18862,7 @@
       </p:sp>
       <p:sp>
         <p:nvSpPr>
-          <p:cNvPr id="270" name="Google Shape;270;p22"/>
+          <p:cNvPr id="269" name="Google Shape;269;p22"/>
           <p:cNvSpPr/>
           <p:nvPr/>
         </p:nvSpPr>
@@ -18972,7 +18999,7 @@
       </p:sp>
       <p:sp>
         <p:nvSpPr>
-          <p:cNvPr id="271" name="Google Shape;271;p22"/>
+          <p:cNvPr id="270" name="Google Shape;270;p22"/>
           <p:cNvSpPr/>
           <p:nvPr/>
         </p:nvSpPr>
@@ -19035,7 +19062,7 @@
       </p:sp>
       <p:sp>
         <p:nvSpPr>
-          <p:cNvPr id="272" name="Google Shape;272;p22"/>
+          <p:cNvPr id="271" name="Google Shape;271;p22"/>
           <p:cNvSpPr/>
           <p:nvPr/>
         </p:nvSpPr>
@@ -19078,7 +19105,7 @@
       </p:sp>
       <p:sp>
         <p:nvSpPr>
-          <p:cNvPr id="273" name="Google Shape;273;p22"/>
+          <p:cNvPr id="272" name="Google Shape;272;p22"/>
           <p:cNvSpPr/>
           <p:nvPr/>
         </p:nvSpPr>
@@ -19141,7 +19168,7 @@
       </p:sp>
       <p:sp>
         <p:nvSpPr>
-          <p:cNvPr id="274" name="Google Shape;274;p22"/>
+          <p:cNvPr id="273" name="Google Shape;273;p22"/>
           <p:cNvSpPr/>
           <p:nvPr/>
         </p:nvSpPr>
@@ -19204,7 +19231,7 @@
       </p:sp>
       <p:sp>
         <p:nvSpPr>
-          <p:cNvPr id="275" name="Google Shape;275;p22"/>
+          <p:cNvPr id="274" name="Google Shape;274;p22"/>
           <p:cNvSpPr/>
           <p:nvPr/>
         </p:nvSpPr>
@@ -19253,7 +19280,7 @@
       </p:sp>
       <p:sp>
         <p:nvSpPr>
-          <p:cNvPr id="276" name="Google Shape;276;p22"/>
+          <p:cNvPr id="275" name="Google Shape;275;p22"/>
           <p:cNvSpPr/>
           <p:nvPr/>
         </p:nvSpPr>
@@ -19353,7 +19380,7 @@
       </p:sp>
       <p:sp>
         <p:nvSpPr>
-          <p:cNvPr id="277" name="Google Shape;277;p22"/>
+          <p:cNvPr id="276" name="Google Shape;276;p22"/>
           <p:cNvSpPr/>
           <p:nvPr/>
         </p:nvSpPr>
@@ -19402,7 +19429,7 @@
       </p:sp>
       <p:sp>
         <p:nvSpPr>
-          <p:cNvPr id="278" name="Google Shape;278;p22"/>
+          <p:cNvPr id="277" name="Google Shape;277;p22"/>
           <p:cNvSpPr/>
           <p:nvPr/>
         </p:nvSpPr>
@@ -19502,7 +19529,7 @@
       </p:sp>
       <p:sp>
         <p:nvSpPr>
-          <p:cNvPr id="279" name="Google Shape;279;p22"/>
+          <p:cNvPr id="278" name="Google Shape;278;p22"/>
           <p:cNvSpPr/>
           <p:nvPr/>
         </p:nvSpPr>
@@ -19551,7 +19578,7 @@
       </p:sp>
       <p:sp>
         <p:nvSpPr>
-          <p:cNvPr id="280" name="Google Shape;280;p22"/>
+          <p:cNvPr id="279" name="Google Shape;279;p22"/>
           <p:cNvSpPr/>
           <p:nvPr/>
         </p:nvSpPr>
@@ -19651,7 +19678,7 @@
       </p:sp>
       <p:sp>
         <p:nvSpPr>
-          <p:cNvPr id="281" name="Google Shape;281;p22"/>
+          <p:cNvPr id="280" name="Google Shape;280;p22"/>
           <p:cNvSpPr/>
           <p:nvPr/>
         </p:nvSpPr>
@@ -19714,7 +19741,7 @@
       </p:sp>
       <p:sp>
         <p:nvSpPr>
-          <p:cNvPr id="282" name="Google Shape;282;p22"/>
+          <p:cNvPr id="281" name="Google Shape;281;p22"/>
           <p:cNvSpPr/>
           <p:nvPr/>
         </p:nvSpPr>
@@ -19763,7 +19790,7 @@
       </p:sp>
       <p:sp>
         <p:nvSpPr>
-          <p:cNvPr id="283" name="Google Shape;283;p22"/>
+          <p:cNvPr id="282" name="Google Shape;282;p22"/>
           <p:cNvSpPr/>
           <p:nvPr/>
         </p:nvSpPr>
@@ -19863,7 +19890,7 @@
       </p:sp>
       <p:sp>
         <p:nvSpPr>
-          <p:cNvPr id="284" name="Google Shape;284;p22"/>
+          <p:cNvPr id="283" name="Google Shape;283;p22"/>
           <p:cNvSpPr/>
           <p:nvPr/>
         </p:nvSpPr>
@@ -19926,7 +19953,7 @@
       </p:sp>
       <p:sp>
         <p:nvSpPr>
-          <p:cNvPr id="285" name="Google Shape;285;p22"/>
+          <p:cNvPr id="284" name="Google Shape;284;p22"/>
           <p:cNvSpPr/>
           <p:nvPr/>
         </p:nvSpPr>
@@ -19975,7 +20002,7 @@
       </p:sp>
       <p:sp>
         <p:nvSpPr>
-          <p:cNvPr id="286" name="Google Shape;286;p22"/>
+          <p:cNvPr id="285" name="Google Shape;285;p22"/>
           <p:cNvSpPr/>
           <p:nvPr/>
         </p:nvSpPr>
@@ -20075,7 +20102,7 @@
       </p:sp>
       <p:sp>
         <p:nvSpPr>
-          <p:cNvPr id="287" name="Google Shape;287;p22"/>
+          <p:cNvPr id="286" name="Google Shape;286;p22"/>
           <p:cNvSpPr/>
           <p:nvPr/>
         </p:nvSpPr>
@@ -20138,7 +20165,7 @@
       </p:sp>
       <p:sp>
         <p:nvSpPr>
-          <p:cNvPr id="288" name="Google Shape;288;p22"/>
+          <p:cNvPr id="287" name="Google Shape;287;p22"/>
           <p:cNvSpPr/>
           <p:nvPr/>
         </p:nvSpPr>
@@ -20181,7 +20208,7 @@
       </p:sp>
       <p:sp>
         <p:nvSpPr>
-          <p:cNvPr id="289" name="Google Shape;289;p22"/>
+          <p:cNvPr id="288" name="Google Shape;288;p22"/>
           <p:cNvSpPr/>
           <p:nvPr/>
         </p:nvSpPr>
@@ -20244,7 +20271,7 @@
       </p:sp>
       <p:sp>
         <p:nvSpPr>
-          <p:cNvPr id="290" name="Google Shape;290;p22"/>
+          <p:cNvPr id="289" name="Google Shape;289;p22"/>
           <p:cNvSpPr/>
           <p:nvPr/>
         </p:nvSpPr>
@@ -20418,7 +20445,7 @@
       </p:sp>
       <p:cxnSp>
         <p:nvCxnSpPr>
-          <p:cNvPr id="291" name="Google Shape;291;p22"/>
+          <p:cNvPr id="290" name="Google Shape;290;p22"/>
           <p:cNvCxnSpPr/>
           <p:nvPr/>
         </p:nvCxnSpPr>
@@ -20444,7 +20471,7 @@
       </p:cxnSp>
       <p:cxnSp>
         <p:nvCxnSpPr>
-          <p:cNvPr id="292" name="Google Shape;292;p22"/>
+          <p:cNvPr id="291" name="Google Shape;291;p22"/>
           <p:cNvCxnSpPr/>
           <p:nvPr/>
         </p:nvCxnSpPr>
@@ -20470,7 +20497,7 @@
       </p:cxnSp>
       <p:sp>
         <p:nvSpPr>
-          <p:cNvPr id="293" name="Google Shape;293;p22"/>
+          <p:cNvPr id="292" name="Google Shape;292;p22"/>
           <p:cNvSpPr/>
           <p:nvPr/>
         </p:nvSpPr>
@@ -20533,7 +20560,7 @@
       </p:sp>
       <p:sp>
         <p:nvSpPr>
-          <p:cNvPr id="294" name="Google Shape;294;p22"/>
+          <p:cNvPr id="293" name="Google Shape;293;p22"/>
           <p:cNvSpPr/>
           <p:nvPr/>
         </p:nvSpPr>
@@ -20596,7 +20623,7 @@
       </p:sp>
       <p:sp>
         <p:nvSpPr>
-          <p:cNvPr id="295" name="Google Shape;295;p22"/>
+          <p:cNvPr id="294" name="Google Shape;294;p22"/>
           <p:cNvSpPr/>
           <p:nvPr/>
         </p:nvSpPr>
@@ -20733,7 +20760,7 @@
       </p:sp>
       <p:sp>
         <p:nvSpPr>
-          <p:cNvPr id="296" name="Google Shape;296;p22"/>
+          <p:cNvPr id="295" name="Google Shape;295;p22"/>
           <p:cNvSpPr/>
           <p:nvPr/>
         </p:nvSpPr>
@@ -20776,7 +20803,7 @@
       </p:sp>
       <p:sp>
         <p:nvSpPr>
-          <p:cNvPr id="297" name="Google Shape;297;p22"/>
+          <p:cNvPr id="296" name="Google Shape;296;p22"/>
           <p:cNvSpPr/>
           <p:nvPr/>
         </p:nvSpPr>
@@ -20839,7 +20866,7 @@
       </p:sp>
       <p:sp>
         <p:nvSpPr>
-          <p:cNvPr id="298" name="Google Shape;298;p22"/>
+          <p:cNvPr id="297" name="Google Shape;297;p22"/>
           <p:cNvSpPr/>
           <p:nvPr/>
         </p:nvSpPr>
@@ -20902,7 +20929,7 @@
       </p:sp>
       <p:cxnSp>
         <p:nvCxnSpPr>
-          <p:cNvPr id="299" name="Google Shape;299;p22"/>
+          <p:cNvPr id="298" name="Google Shape;298;p22"/>
           <p:cNvCxnSpPr/>
           <p:nvPr/>
         </p:nvCxnSpPr>

--- a/data/포트폴리오_조영하.pptx
+++ b/data/포트폴리오_조영하.pptx
@@ -17,6 +17,8 @@
     <p:sldId id="262" r:id="rId12"/>
     <p:sldId id="263" r:id="rId13"/>
     <p:sldId id="264" r:id="rId14"/>
+    <p:sldId id="265" r:id="rId20"/>
+    <p:sldId id="266" r:id="rId21"/>
   </p:sldIdLst>
   <p:sldSz cy="5143500" cx="9144000"/>
   <p:notesSz cx="6858000" cy="9144000"/>
@@ -7287,6 +7289,2414 @@
 </p:sld>
 </file>
 
+<file path=ppt/slides/slide10.xml><?xml version="1.0" encoding="utf-8"?>
+<p:sld xmlns:a="http://schemas.openxmlformats.org/drawingml/2006/main" xmlns:r="http://schemas.openxmlformats.org/officeDocument/2006/relationships" xmlns:mc="http://schemas.openxmlformats.org/markup-compatibility/2006" xmlns:mv="urn:schemas-microsoft-com:mac:vml" xmlns:p="http://schemas.openxmlformats.org/presentationml/2006/main" xmlns:c="http://schemas.openxmlformats.org/drawingml/2006/chart" xmlns:dgm="http://schemas.openxmlformats.org/drawingml/2006/diagram" xmlns:o="urn:schemas-microsoft-com:office:office" xmlns:v="urn:schemas-microsoft-com:vml" xmlns:pvml="urn:schemas-microsoft-com:office:powerpoint" xmlns:com="http://schemas.openxmlformats.org/drawingml/2006/compatibility" xmlns:p14="http://schemas.microsoft.com/office/powerpoint/2010/main" xmlns:p15="http://schemas.microsoft.com/office/powerpoint/2012/main" xmlns:ahyp="http://schemas.microsoft.com/office/drawing/2018/hyperlinkcolor">
+  <p:cSld>
+    <p:bg>
+      <p:bgPr>
+        <a:solidFill>
+          <a:srgbClr val="FAFAFA"/>
+        </a:solidFill>
+      </p:bgPr>
+    </p:bg>
+    <p:spTree>
+      <p:nvGrpSpPr>
+        <p:cNvPr id="226" name="Shape 226"/>
+        <p:cNvGrpSpPr/>
+        <p:nvPr/>
+      </p:nvGrpSpPr>
+      <p:grpSpPr>
+        <a:xfrm>
+          <a:off x="0" y="0"/>
+          <a:ext cx="0" cy="0"/>
+          <a:chOff x="0" y="0"/>
+          <a:chExt cx="0" cy="0"/>
+        </a:xfrm>
+      </p:grpSpPr>
+      <p:sp>
+        <p:nvSpPr>
+          <p:cNvPr id="501" name="Shape 501"/>
+          <p:cNvSpPr txBox="1"/>
+          <p:nvPr/>
+        </p:nvSpPr>
+        <p:spPr>
+          <a:xfrm>
+            <a:off x="640080" y="274320"/>
+            <a:ext cx="7772400" cy="457200"/>
+          </a:xfrm>
+          <a:prstGeom prst="rect">
+            <a:avLst/>
+          </a:prstGeom>
+          <a:noFill/>
+          <a:ln>
+            <a:noFill/>
+          </a:ln>
+        </p:spPr>
+        <p:txBody>
+          <a:bodyPr anchorCtr="0" anchor="t" bIns="45720" lIns="91440" rIns="91440" tIns="45720" wrap="square">
+            <a:noAutofit/>
+          </a:bodyPr>
+          <a:lstStyle/>
+          <a:p>
+            <a:pPr indent="0" lvl="0" marL="0" marR="0" rtl="0" algn="l">
+              <a:lnSpc>
+                <a:spcPct val="100000"/>
+              </a:lnSpc>
+              <a:spcBef>
+                <a:spcPts val="0"/>
+              </a:spcBef>
+              <a:spcAft>
+                <a:spcPts val="0"/>
+              </a:spcAft>
+              <a:buNone/>
+            </a:pPr>
+            <a:r>
+              <a:rPr b="1" i="0" lang="ko" sz="2600" u="none" cap="none" strike="noStrike">
+                <a:solidFill>
+                  <a:srgbClr val="212121"/>
+                </a:solidFill>
+                <a:latin typeface="Arial Black"/>
+                <a:ea typeface="Arial Black"/>
+                <a:cs typeface="Arial Black"/>
+                <a:sym typeface="Arial Black"/>
+              </a:rPr>
+              <a:t>Multimodal RAG: 도면까지 읽는 매뉴얼 QA</a:t>
+            </a:r>
+          </a:p>
+        </p:txBody>
+      </p:sp>
+      <p:sp>
+        <p:nvSpPr>
+          <p:cNvPr id="502" name="Shape 502"/>
+          <p:cNvSpPr txBox="1"/>
+          <p:nvPr/>
+        </p:nvSpPr>
+        <p:spPr>
+          <a:xfrm>
+            <a:off x="640080" y="731520"/>
+            <a:ext cx="7772400" cy="320040"/>
+          </a:xfrm>
+          <a:prstGeom prst="rect">
+            <a:avLst/>
+          </a:prstGeom>
+          <a:noFill/>
+          <a:ln>
+            <a:noFill/>
+          </a:ln>
+        </p:spPr>
+        <p:txBody>
+          <a:bodyPr anchorCtr="0" anchor="t" bIns="45720" lIns="91440" rIns="91440" tIns="45720" wrap="square">
+            <a:noAutofit/>
+          </a:bodyPr>
+          <a:lstStyle/>
+          <a:p>
+            <a:pPr indent="0" lvl="0" marL="0" marR="0" rtl="0" algn="l">
+              <a:lnSpc>
+                <a:spcPct val="100000"/>
+              </a:lnSpc>
+              <a:spcBef>
+                <a:spcPts val="0"/>
+              </a:spcBef>
+              <a:spcAft>
+                <a:spcPts val="0"/>
+              </a:spcAft>
+              <a:buNone/>
+            </a:pPr>
+            <a:r>
+              <a:rPr b="0" i="0" lang="ko" sz="1300" u="none" cap="none" strike="noStrike">
+                <a:solidFill>
+                  <a:srgbClr val="90A4AE"/>
+                </a:solidFill>
+                <a:latin typeface="Arial"/>
+                <a:ea typeface="Arial"/>
+                <a:cs typeface="Arial"/>
+                <a:sym typeface="Arial"/>
+              </a:rPr>
+              <a:t>개인 프로젝트 12주 · 가전 매뉴얼 6종(252p) · 텍스트 RAG → 크로스모달 → Agent</a:t>
+            </a:r>
+          </a:p>
+        </p:txBody>
+      </p:sp>
+      <p:sp>
+        <p:nvSpPr>
+          <p:cNvPr id="503" name="Shape 503"/>
+          <p:cNvSpPr txBox="1"/>
+          <p:nvPr/>
+        </p:nvSpPr>
+        <p:spPr>
+          <a:xfrm>
+            <a:off x="640080" y="1097280"/>
+            <a:ext cx="1097280" cy="36576"/>
+          </a:xfrm>
+          <a:prstGeom prst="rect">
+            <a:avLst/>
+          </a:prstGeom>
+          <a:solidFill>
+            <a:srgbClr val="1565C0"/>
+          </a:solidFill>
+          <a:ln>
+            <a:noFill/>
+          </a:ln>
+        </p:spPr>
+        <p:txBody>
+          <a:bodyPr anchorCtr="0" anchor="t" bIns="45720" lIns="91440" rIns="91440" tIns="45720" wrap="square">
+            <a:noAutofit/>
+          </a:bodyPr>
+          <a:lstStyle/>
+          <a:p>
+            <a:pPr indent="0" lvl="0" marL="0" marR="0" rtl="0" algn="l">
+              <a:lnSpc>
+                <a:spcPct val="100000"/>
+              </a:lnSpc>
+              <a:spcBef>
+                <a:spcPts val="0"/>
+              </a:spcBef>
+              <a:spcAft>
+                <a:spcPts val="0"/>
+              </a:spcAft>
+              <a:buNone/>
+            </a:pPr>
+          </a:p>
+        </p:txBody>
+      </p:sp>
+      <p:sp>
+        <p:nvSpPr>
+          <p:cNvPr id="504" name="Shape 504"/>
+          <p:cNvSpPr txBox="1"/>
+          <p:nvPr/>
+        </p:nvSpPr>
+        <p:spPr>
+          <a:xfrm>
+            <a:off x="8503920" y="4709160"/>
+            <a:ext cx="457200" cy="320040"/>
+          </a:xfrm>
+          <a:prstGeom prst="rect">
+            <a:avLst/>
+          </a:prstGeom>
+          <a:noFill/>
+          <a:ln>
+            <a:noFill/>
+          </a:ln>
+        </p:spPr>
+        <p:txBody>
+          <a:bodyPr anchorCtr="0" anchor="t" bIns="45720" lIns="91440" rIns="91440" tIns="45720" wrap="square">
+            <a:noAutofit/>
+          </a:bodyPr>
+          <a:lstStyle/>
+          <a:p>
+            <a:pPr indent="0" lvl="0" marL="0" marR="0" rtl="0" algn="r">
+              <a:lnSpc>
+                <a:spcPct val="100000"/>
+              </a:lnSpc>
+              <a:spcBef>
+                <a:spcPts val="0"/>
+              </a:spcBef>
+              <a:spcAft>
+                <a:spcPts val="0"/>
+              </a:spcAft>
+              <a:buNone/>
+            </a:pPr>
+            <a:r>
+              <a:rPr b="0" i="0" lang="ko" sz="1000" u="none" cap="none" strike="noStrike">
+                <a:solidFill>
+                  <a:srgbClr val="90A4AE"/>
+                </a:solidFill>
+                <a:latin typeface="Arial"/>
+                <a:ea typeface="Arial"/>
+                <a:cs typeface="Arial"/>
+                <a:sym typeface="Arial"/>
+              </a:rPr>
+              <a:t>10</a:t>
+            </a:r>
+          </a:p>
+        </p:txBody>
+      </p:sp>
+      <p:sp>
+        <p:nvSpPr>
+          <p:cNvPr id="505" name="Shape 505"/>
+          <p:cNvSpPr txBox="1"/>
+          <p:nvPr/>
+        </p:nvSpPr>
+        <p:spPr>
+          <a:xfrm>
+            <a:off x="457200" y="1417320"/>
+            <a:ext cx="2377440" cy="1737360"/>
+          </a:xfrm>
+          <a:prstGeom prst="rect">
+            <a:avLst/>
+          </a:prstGeom>
+          <a:solidFill>
+            <a:srgbClr val="1B2838"/>
+          </a:solidFill>
+          <a:ln>
+            <a:noFill/>
+          </a:ln>
+        </p:spPr>
+        <p:txBody>
+          <a:bodyPr anchorCtr="0" anchor="t" bIns="45720" lIns="91440" rIns="91440" tIns="45720" wrap="square">
+            <a:noAutofit/>
+          </a:bodyPr>
+          <a:lstStyle/>
+          <a:p>
+            <a:pPr indent="0" lvl="0" marL="0" marR="0" rtl="0" algn="l">
+              <a:lnSpc>
+                <a:spcPct val="100000"/>
+              </a:lnSpc>
+              <a:spcBef>
+                <a:spcPts val="200"/>
+              </a:spcBef>
+              <a:spcAft>
+                <a:spcPts val="0"/>
+              </a:spcAft>
+              <a:buNone/>
+            </a:pPr>
+            <a:r>
+              <a:rPr b="1" i="0" lang="ko" sz="1100" u="none" cap="none" strike="noStrike">
+                <a:solidFill>
+                  <a:srgbClr val="90A4AE"/>
+                </a:solidFill>
+                <a:latin typeface="Arial"/>
+                <a:ea typeface="Arial"/>
+                <a:cs typeface="Arial"/>
+                <a:sym typeface="Arial"/>
+              </a:rPr>
+              <a:t>풀려던 문제</a:t>
+            </a:r>
+          </a:p>
+          <a:p>
+            <a:pPr indent="0" lvl="0" marL="0" marR="0" rtl="0" algn="l">
+              <a:lnSpc>
+                <a:spcPct val="100000"/>
+              </a:lnSpc>
+              <a:spcBef>
+                <a:spcPts val="600"/>
+              </a:spcBef>
+              <a:spcAft>
+                <a:spcPts val="0"/>
+              </a:spcAft>
+              <a:buNone/>
+            </a:pPr>
+            <a:r>
+              <a:rPr b="1" i="0" lang="ko" sz="1500" u="none" cap="none" strike="noStrike">
+                <a:solidFill>
+                  <a:srgbClr val="FFFFFF"/>
+                </a:solidFill>
+                <a:latin typeface="Arial"/>
+                <a:ea typeface="Arial"/>
+                <a:cs typeface="Arial"/>
+                <a:sym typeface="Arial"/>
+              </a:rPr>
+              <a:t>답이 그림에만 있다</a:t>
+            </a:r>
+          </a:p>
+          <a:p>
+            <a:pPr indent="0" lvl="0" marL="0" marR="0" rtl="0" algn="l">
+              <a:lnSpc>
+                <a:spcPct val="100000"/>
+              </a:lnSpc>
+              <a:spcBef>
+                <a:spcPts val="600"/>
+              </a:spcBef>
+              <a:spcAft>
+                <a:spcPts val="0"/>
+              </a:spcAft>
+              <a:buNone/>
+            </a:pPr>
+            <a:r>
+              <a:rPr b="0" i="0" lang="ko" sz="1000" u="none" cap="none" strike="noStrike">
+                <a:solidFill>
+                  <a:srgbClr val="E3F2FD"/>
+                </a:solidFill>
+                <a:latin typeface="Arial"/>
+                <a:ea typeface="Arial"/>
+                <a:cs typeface="Arial"/>
+                <a:sym typeface="Arial"/>
+              </a:rPr>
+              <a:t>본문은 기능만 서술하고,</a:t>
+            </a:r>
+          </a:p>
+          <a:p>
+            <a:pPr indent="0" lvl="0" marL="0" marR="0" rtl="0" algn="l">
+              <a:lnSpc>
+                <a:spcPct val="100000"/>
+              </a:lnSpc>
+              <a:spcBef>
+                <a:spcPts val="0"/>
+              </a:spcBef>
+              <a:spcAft>
+                <a:spcPts val="0"/>
+              </a:spcAft>
+              <a:buNone/>
+            </a:pPr>
+            <a:r>
+              <a:rPr b="0" i="0" lang="ko" sz="1000" u="none" cap="none" strike="noStrike">
+                <a:solidFill>
+                  <a:srgbClr val="E3F2FD"/>
+                </a:solidFill>
+                <a:latin typeface="Arial"/>
+                <a:ea typeface="Arial"/>
+                <a:cs typeface="Arial"/>
+                <a:sym typeface="Arial"/>
+              </a:rPr>
+              <a:t>위치·방향·아이콘은 도면에만.</a:t>
+            </a:r>
+          </a:p>
+          <a:p>
+            <a:pPr indent="0" lvl="0" marL="0" marR="0" rtl="0" algn="l">
+              <a:lnSpc>
+                <a:spcPct val="100000"/>
+              </a:lnSpc>
+              <a:spcBef>
+                <a:spcPts val="500"/>
+              </a:spcBef>
+              <a:spcAft>
+                <a:spcPts val="0"/>
+              </a:spcAft>
+              <a:buNone/>
+            </a:pPr>
+            <a:r>
+              <a:rPr b="1" i="0" lang="ko" sz="1100" u="none" cap="none" strike="noStrike">
+                <a:solidFill>
+                  <a:srgbClr val="E65100"/>
+                </a:solidFill>
+                <a:latin typeface="Arial"/>
+                <a:ea typeface="Arial"/>
+                <a:cs typeface="Arial"/>
+                <a:sym typeface="Arial"/>
+              </a:rPr>
+              <a:t>텍스트 RAG 정답 0/27</a:t>
+            </a:r>
+          </a:p>
+        </p:txBody>
+      </p:sp>
+      <p:sp>
+        <p:nvSpPr>
+          <p:cNvPr id="506" name="Shape 506"/>
+          <p:cNvSpPr txBox="1"/>
+          <p:nvPr/>
+        </p:nvSpPr>
+        <p:spPr>
+          <a:xfrm>
+            <a:off x="3017520" y="1417320"/>
+            <a:ext cx="2926080" cy="1737360"/>
+          </a:xfrm>
+          <a:prstGeom prst="rect">
+            <a:avLst/>
+          </a:prstGeom>
+          <a:solidFill>
+            <a:srgbClr val="FFFFFF"/>
+          </a:solidFill>
+          <a:ln cap="flat" cmpd="sng" w="12700">
+            <a:solidFill>
+              <a:srgbClr val="1565C0"/>
+            </a:solidFill>
+            <a:prstDash val="solid"/>
+            <a:round/>
+            <a:headEnd len="sm" w="sm" type="none"/>
+            <a:tailEnd len="sm" w="sm" type="none"/>
+          </a:ln>
+        </p:spPr>
+        <p:txBody>
+          <a:bodyPr anchorCtr="0" anchor="t" bIns="45720" lIns="91440" rIns="91440" tIns="45720" wrap="square">
+            <a:noAutofit/>
+          </a:bodyPr>
+          <a:lstStyle/>
+          <a:p>
+            <a:pPr indent="0" lvl="0" marL="0" marR="0" rtl="0" algn="l">
+              <a:lnSpc>
+                <a:spcPct val="100000"/>
+              </a:lnSpc>
+              <a:spcBef>
+                <a:spcPts val="0"/>
+              </a:spcBef>
+              <a:spcAft>
+                <a:spcPts val="0"/>
+              </a:spcAft>
+              <a:buNone/>
+            </a:pPr>
+          </a:p>
+        </p:txBody>
+      </p:sp>
+      <p:sp>
+        <p:nvSpPr>
+          <p:cNvPr id="507" name="Shape 507"/>
+          <p:cNvSpPr txBox="1"/>
+          <p:nvPr/>
+        </p:nvSpPr>
+        <p:spPr>
+          <a:xfrm>
+            <a:off x="3108960" y="1508760"/>
+            <a:ext cx="2743200" cy="502920"/>
+          </a:xfrm>
+          <a:prstGeom prst="rect">
+            <a:avLst/>
+          </a:prstGeom>
+          <a:solidFill>
+            <a:srgbClr val="E3F2FD"/>
+          </a:solidFill>
+          <a:ln>
+            <a:noFill/>
+          </a:ln>
+        </p:spPr>
+        <p:txBody>
+          <a:bodyPr anchorCtr="0" anchor="t" bIns="45720" lIns="91440" rIns="91440" tIns="45720" wrap="square">
+            <a:noAutofit/>
+          </a:bodyPr>
+          <a:lstStyle/>
+          <a:p>
+            <a:pPr indent="0" lvl="0" marL="0" marR="0" rtl="0" algn="l">
+              <a:lnSpc>
+                <a:spcPct val="100000"/>
+              </a:lnSpc>
+              <a:spcBef>
+                <a:spcPts val="0"/>
+              </a:spcBef>
+              <a:spcAft>
+                <a:spcPts val="0"/>
+              </a:spcAft>
+              <a:buNone/>
+            </a:pPr>
+            <a:r>
+              <a:rPr b="1" i="0" lang="ko" sz="1050" u="none" cap="none" strike="noStrike">
+                <a:solidFill>
+                  <a:srgbClr val="1565C0"/>
+                </a:solidFill>
+                <a:latin typeface="Arial"/>
+                <a:ea typeface="Arial"/>
+                <a:cs typeface="Arial"/>
+                <a:sym typeface="Arial"/>
+              </a:rPr>
+              <a:t>① 텍스트 RAG</a:t>
+            </a:r>
+          </a:p>
+          <a:p>
+            <a:pPr indent="0" lvl="0" marL="0" marR="0" rtl="0" algn="l">
+              <a:lnSpc>
+                <a:spcPct val="100000"/>
+              </a:lnSpc>
+              <a:spcBef>
+                <a:spcPts val="200"/>
+              </a:spcBef>
+              <a:spcAft>
+                <a:spcPts val="0"/>
+              </a:spcAft>
+              <a:buNone/>
+            </a:pPr>
+            <a:r>
+              <a:rPr b="0" i="0" lang="ko" sz="900" u="none" cap="none" strike="noStrike">
+                <a:solidFill>
+                  <a:srgbClr val="212121"/>
+                </a:solidFill>
+                <a:latin typeface="Arial"/>
+                <a:ea typeface="Arial"/>
+                <a:cs typeface="Arial"/>
+                <a:sym typeface="Arial"/>
+              </a:rPr>
+              <a:t>Hybrid(BM25+Dense)+Reranker → Top-1 91.3%</a:t>
+            </a:r>
+          </a:p>
+        </p:txBody>
+      </p:sp>
+      <p:sp>
+        <p:nvSpPr>
+          <p:cNvPr id="508" name="Shape 508"/>
+          <p:cNvSpPr txBox="1"/>
+          <p:nvPr/>
+        </p:nvSpPr>
+        <p:spPr>
+          <a:xfrm>
+            <a:off x="3108960" y="2103120"/>
+            <a:ext cx="2743200" cy="502920"/>
+          </a:xfrm>
+          <a:prstGeom prst="rect">
+            <a:avLst/>
+          </a:prstGeom>
+          <a:solidFill>
+            <a:srgbClr val="E3F2FD"/>
+          </a:solidFill>
+          <a:ln>
+            <a:noFill/>
+          </a:ln>
+        </p:spPr>
+        <p:txBody>
+          <a:bodyPr anchorCtr="0" anchor="t" bIns="45720" lIns="91440" rIns="91440" tIns="45720" wrap="square">
+            <a:noAutofit/>
+          </a:bodyPr>
+          <a:lstStyle/>
+          <a:p>
+            <a:pPr indent="0" lvl="0" marL="0" marR="0" rtl="0" algn="l">
+              <a:lnSpc>
+                <a:spcPct val="100000"/>
+              </a:lnSpc>
+              <a:spcBef>
+                <a:spcPts val="0"/>
+              </a:spcBef>
+              <a:spcAft>
+                <a:spcPts val="0"/>
+              </a:spcAft>
+              <a:buNone/>
+            </a:pPr>
+            <a:r>
+              <a:rPr b="1" i="0" lang="ko" sz="1050" u="none" cap="none" strike="noStrike">
+                <a:solidFill>
+                  <a:srgbClr val="1565C0"/>
+                </a:solidFill>
+                <a:latin typeface="Arial"/>
+                <a:ea typeface="Arial"/>
+                <a:cs typeface="Arial"/>
+                <a:sym typeface="Arial"/>
+              </a:rPr>
+              <a:t>② Agentic RAG</a:t>
+            </a:r>
+          </a:p>
+          <a:p>
+            <a:pPr indent="0" lvl="0" marL="0" marR="0" rtl="0" algn="l">
+              <a:lnSpc>
+                <a:spcPct val="100000"/>
+              </a:lnSpc>
+              <a:spcBef>
+                <a:spcPts val="200"/>
+              </a:spcBef>
+              <a:spcAft>
+                <a:spcPts val="0"/>
+              </a:spcAft>
+              <a:buNone/>
+            </a:pPr>
+            <a:r>
+              <a:rPr b="0" i="0" lang="ko" sz="900" u="none" cap="none" strike="noStrike">
+                <a:solidFill>
+                  <a:srgbClr val="212121"/>
+                </a:solidFill>
+                <a:latin typeface="Arial"/>
+                <a:ea typeface="Arial"/>
+                <a:cs typeface="Arial"/>
+                <a:sym typeface="Arial"/>
+              </a:rPr>
+              <a:t>LangGraph 4노드 + Self-Query → 95.7%</a:t>
+            </a:r>
+          </a:p>
+        </p:txBody>
+      </p:sp>
+      <p:sp>
+        <p:nvSpPr>
+          <p:cNvPr id="509" name="Shape 509"/>
+          <p:cNvSpPr txBox="1"/>
+          <p:nvPr/>
+        </p:nvSpPr>
+        <p:spPr>
+          <a:xfrm>
+            <a:off x="3108960" y="2697480"/>
+            <a:ext cx="2743200" cy="502920"/>
+          </a:xfrm>
+          <a:prstGeom prst="rect">
+            <a:avLst/>
+          </a:prstGeom>
+          <a:solidFill>
+            <a:srgbClr val="E3F2FD"/>
+          </a:solidFill>
+          <a:ln>
+            <a:noFill/>
+          </a:ln>
+        </p:spPr>
+        <p:txBody>
+          <a:bodyPr anchorCtr="0" anchor="t" bIns="45720" lIns="91440" rIns="91440" tIns="45720" wrap="square">
+            <a:noAutofit/>
+          </a:bodyPr>
+          <a:lstStyle/>
+          <a:p>
+            <a:pPr indent="0" lvl="0" marL="0" marR="0" rtl="0" algn="l">
+              <a:lnSpc>
+                <a:spcPct val="100000"/>
+              </a:lnSpc>
+              <a:spcBef>
+                <a:spcPts val="0"/>
+              </a:spcBef>
+              <a:spcAft>
+                <a:spcPts val="0"/>
+              </a:spcAft>
+              <a:buNone/>
+            </a:pPr>
+            <a:r>
+              <a:rPr b="1" i="0" lang="ko" sz="1050" u="none" cap="none" strike="noStrike">
+                <a:solidFill>
+                  <a:srgbClr val="1565C0"/>
+                </a:solidFill>
+                <a:latin typeface="Arial"/>
+                <a:ea typeface="Arial"/>
+                <a:cs typeface="Arial"/>
+                <a:sym typeface="Arial"/>
+              </a:rPr>
+              <a:t>③ 크로스모달</a:t>
+            </a:r>
+          </a:p>
+          <a:p>
+            <a:pPr indent="0" lvl="0" marL="0" marR="0" rtl="0" algn="l">
+              <a:lnSpc>
+                <a:spcPct val="100000"/>
+              </a:lnSpc>
+              <a:spcBef>
+                <a:spcPts val="200"/>
+              </a:spcBef>
+              <a:spcAft>
+                <a:spcPts val="0"/>
+              </a:spcAft>
+              <a:buNone/>
+            </a:pPr>
+            <a:r>
+              <a:rPr b="0" i="0" lang="ko" sz="900" u="none" cap="none" strike="noStrike">
+                <a:solidFill>
+                  <a:srgbClr val="212121"/>
+                </a:solidFill>
+                <a:latin typeface="Arial"/>
+                <a:ea typeface="Arial"/>
+                <a:cs typeface="Arial"/>
+                <a:sym typeface="Arial"/>
+              </a:rPr>
+              <a:t>영역 캡션을 텍스트 인덱스에 합류</a:t>
+            </a:r>
+          </a:p>
+        </p:txBody>
+      </p:sp>
+      <p:sp>
+        <p:nvSpPr>
+          <p:cNvPr id="510" name="Shape 510"/>
+          <p:cNvSpPr txBox="1"/>
+          <p:nvPr/>
+        </p:nvSpPr>
+        <p:spPr>
+          <a:xfrm>
+            <a:off x="6035040" y="1417320"/>
+            <a:ext cx="2651760" cy="1737360"/>
+          </a:xfrm>
+          <a:prstGeom prst="rect">
+            <a:avLst/>
+          </a:prstGeom>
+          <a:solidFill>
+            <a:srgbClr val="FFFFFF"/>
+          </a:solidFill>
+          <a:ln cap="flat" cmpd="sng" w="12700">
+            <a:solidFill>
+              <a:srgbClr val="90A4AE"/>
+            </a:solidFill>
+            <a:prstDash val="solid"/>
+            <a:round/>
+            <a:headEnd len="sm" w="sm" type="none"/>
+            <a:tailEnd len="sm" w="sm" type="none"/>
+          </a:ln>
+        </p:spPr>
+        <p:txBody>
+          <a:bodyPr anchorCtr="0" anchor="t" bIns="45720" lIns="91440" rIns="91440" tIns="45720" wrap="square">
+            <a:noAutofit/>
+          </a:bodyPr>
+          <a:lstStyle/>
+          <a:p>
+            <a:pPr indent="0" lvl="0" marL="0" marR="0" rtl="0" algn="l">
+              <a:lnSpc>
+                <a:spcPct val="100000"/>
+              </a:lnSpc>
+              <a:spcBef>
+                <a:spcPts val="200"/>
+              </a:spcBef>
+              <a:spcAft>
+                <a:spcPts val="0"/>
+              </a:spcAft>
+              <a:buNone/>
+            </a:pPr>
+            <a:r>
+              <a:rPr b="1" i="0" lang="ko" sz="1100" u="none" cap="none" strike="noStrike">
+                <a:solidFill>
+                  <a:srgbClr val="1565C0"/>
+                </a:solidFill>
+                <a:latin typeface="Arial"/>
+                <a:ea typeface="Arial"/>
+                <a:cs typeface="Arial"/>
+                <a:sym typeface="Arial"/>
+              </a:rPr>
+              <a:t>핵심 설계 결정</a:t>
+            </a:r>
+          </a:p>
+          <a:p>
+            <a:pPr indent="0" lvl="0" marL="0" marR="0" rtl="0" algn="l">
+              <a:lnSpc>
+                <a:spcPct val="100000"/>
+              </a:lnSpc>
+              <a:spcBef>
+                <a:spcPts val="600"/>
+              </a:spcBef>
+              <a:spcAft>
+                <a:spcPts val="0"/>
+              </a:spcAft>
+              <a:buNone/>
+            </a:pPr>
+            <a:r>
+              <a:rPr b="1" i="0" lang="ko" sz="1200" u="none" cap="none" strike="noStrike">
+                <a:solidFill>
+                  <a:srgbClr val="212121"/>
+                </a:solidFill>
+                <a:latin typeface="Arial"/>
+                <a:ea typeface="Arial"/>
+                <a:cs typeface="Arial"/>
+                <a:sym typeface="Arial"/>
+              </a:rPr>
+              <a:t>CLIP 12%  vs  VLM 캡션 75%</a:t>
+            </a:r>
+          </a:p>
+          <a:p>
+            <a:pPr indent="0" lvl="0" marL="0" marR="0" rtl="0" algn="l">
+              <a:lnSpc>
+                <a:spcPct val="100000"/>
+              </a:lnSpc>
+              <a:spcBef>
+                <a:spcPts val="600"/>
+              </a:spcBef>
+              <a:spcAft>
+                <a:spcPts val="0"/>
+              </a:spcAft>
+              <a:buNone/>
+            </a:pPr>
+            <a:r>
+              <a:rPr b="0" i="0" lang="ko" sz="1000" u="none" cap="none" strike="noStrike">
+                <a:solidFill>
+                  <a:srgbClr val="212121"/>
+                </a:solidFill>
+                <a:latin typeface="Arial"/>
+                <a:ea typeface="Arial"/>
+                <a:cs typeface="Arial"/>
+                <a:sym typeface="Arial"/>
+              </a:rPr>
+              <a:t>이미지 임베딩 대신 VLM이 만든</a:t>
+            </a:r>
+          </a:p>
+          <a:p>
+            <a:pPr indent="0" lvl="0" marL="0" marR="0" rtl="0" algn="l">
+              <a:lnSpc>
+                <a:spcPct val="100000"/>
+              </a:lnSpc>
+              <a:spcBef>
+                <a:spcPts val="0"/>
+              </a:spcBef>
+              <a:spcAft>
+                <a:spcPts val="0"/>
+              </a:spcAft>
+              <a:buNone/>
+            </a:pPr>
+            <a:r>
+              <a:rPr b="0" i="0" lang="ko" sz="1000" u="none" cap="none" strike="noStrike">
+                <a:solidFill>
+                  <a:srgbClr val="212121"/>
+                </a:solidFill>
+                <a:latin typeface="Arial"/>
+                <a:ea typeface="Arial"/>
+                <a:cs typeface="Arial"/>
+                <a:sym typeface="Arial"/>
+              </a:rPr>
+              <a:t>구조화 캡션을 기존 텍스트</a:t>
+            </a:r>
+          </a:p>
+          <a:p>
+            <a:pPr indent="0" lvl="0" marL="0" marR="0" rtl="0" algn="l">
+              <a:lnSpc>
+                <a:spcPct val="100000"/>
+              </a:lnSpc>
+              <a:spcBef>
+                <a:spcPts val="0"/>
+              </a:spcBef>
+              <a:spcAft>
+                <a:spcPts val="0"/>
+              </a:spcAft>
+              <a:buNone/>
+            </a:pPr>
+            <a:r>
+              <a:rPr b="0" i="0" lang="ko" sz="1000" u="none" cap="none" strike="noStrike">
+                <a:solidFill>
+                  <a:srgbClr val="212121"/>
+                </a:solidFill>
+                <a:latin typeface="Arial"/>
+                <a:ea typeface="Arial"/>
+                <a:cs typeface="Arial"/>
+                <a:sym typeface="Arial"/>
+              </a:rPr>
+              <a:t>인덱스에 합류시키는 방식 채택</a:t>
+            </a:r>
+          </a:p>
+          <a:p>
+            <a:pPr indent="0" lvl="0" marL="0" marR="0" rtl="0" algn="l">
+              <a:lnSpc>
+                <a:spcPct val="100000"/>
+              </a:lnSpc>
+              <a:spcBef>
+                <a:spcPts val="400"/>
+              </a:spcBef>
+              <a:spcAft>
+                <a:spcPts val="0"/>
+              </a:spcAft>
+              <a:buNone/>
+            </a:pPr>
+            <a:r>
+              <a:rPr b="0" i="0" lang="ko" sz="900" u="none" cap="none" strike="noStrike">
+                <a:solidFill>
+                  <a:srgbClr val="90A4AE"/>
+                </a:solidFill>
+                <a:latin typeface="Arial"/>
+                <a:ea typeface="Arial"/>
+                <a:cs typeface="Arial"/>
+                <a:sym typeface="Arial"/>
+              </a:rPr>
+              <a:t>선화 도면 + 한국어 라벨에서</a:t>
+            </a:r>
+          </a:p>
+          <a:p>
+            <a:pPr indent="0" lvl="0" marL="0" marR="0" rtl="0" algn="l">
+              <a:lnSpc>
+                <a:spcPct val="100000"/>
+              </a:lnSpc>
+              <a:spcBef>
+                <a:spcPts val="0"/>
+              </a:spcBef>
+              <a:spcAft>
+                <a:spcPts val="0"/>
+              </a:spcAft>
+              <a:buNone/>
+            </a:pPr>
+            <a:r>
+              <a:rPr b="0" i="0" lang="ko" sz="900" u="none" cap="none" strike="noStrike">
+                <a:solidFill>
+                  <a:srgbClr val="90A4AE"/>
+                </a:solidFill>
+                <a:latin typeface="Arial"/>
+                <a:ea typeface="Arial"/>
+                <a:cs typeface="Arial"/>
+                <a:sym typeface="Arial"/>
+              </a:rPr>
+              <a:t>CLIP은 도메인 부적합 (ADR-012)</a:t>
+            </a:r>
+          </a:p>
+        </p:txBody>
+      </p:sp>
+      <p:sp>
+        <p:nvSpPr>
+          <p:cNvPr id="511" name="Shape 511"/>
+          <p:cNvSpPr txBox="1"/>
+          <p:nvPr/>
+        </p:nvSpPr>
+        <p:spPr>
+          <a:xfrm>
+            <a:off x="457200" y="3383280"/>
+            <a:ext cx="8229600" cy="502920"/>
+          </a:xfrm>
+          <a:prstGeom prst="rect">
+            <a:avLst/>
+          </a:prstGeom>
+          <a:solidFill>
+            <a:srgbClr val="E3F2FD"/>
+          </a:solidFill>
+          <a:ln>
+            <a:noFill/>
+          </a:ln>
+        </p:spPr>
+        <p:txBody>
+          <a:bodyPr anchorCtr="0" anchor="ctr" bIns="45720" lIns="91440" rIns="91440" tIns="45720" wrap="square">
+            <a:noAutofit/>
+          </a:bodyPr>
+          <a:lstStyle/>
+          <a:p>
+            <a:pPr indent="0" lvl="0" marL="0" marR="0" rtl="0" algn="l">
+              <a:lnSpc>
+                <a:spcPct val="100000"/>
+              </a:lnSpc>
+              <a:spcBef>
+                <a:spcPts val="0"/>
+              </a:spcBef>
+              <a:spcAft>
+                <a:spcPts val="0"/>
+              </a:spcAft>
+              <a:buNone/>
+            </a:pPr>
+            <a:r>
+              <a:rPr b="1" i="0" lang="ko" sz="1000" u="none" cap="none" strike="noStrike">
+                <a:solidFill>
+                  <a:srgbClr val="1565C0"/>
+                </a:solidFill>
+                <a:latin typeface="Arial"/>
+                <a:ea typeface="Arial"/>
+                <a:cs typeface="Arial"/>
+                <a:sym typeface="Arial"/>
+              </a:rPr>
+              <a:t>평가셋 61문항 직접 구축 (도면에만 답이 있는 image-required 27문항)  ·  RAGAS + Citation · Refusal 도메인 메트릭으로 평가 파이프라인 자동화</a:t>
+            </a:r>
+          </a:p>
+        </p:txBody>
+      </p:sp>
+    </p:spTree>
+  </p:cSld>
+  <p:clrMapOvr>
+    <a:masterClrMapping/>
+  </p:clrMapOvr>
+</p:sld>
+</file>
+
+<file path=ppt/slides/slide11.xml><?xml version="1.0" encoding="utf-8"?>
+<p:sld xmlns:a="http://schemas.openxmlformats.org/drawingml/2006/main" xmlns:r="http://schemas.openxmlformats.org/officeDocument/2006/relationships" xmlns:mc="http://schemas.openxmlformats.org/markup-compatibility/2006" xmlns:mv="urn:schemas-microsoft-com:mac:vml" xmlns:p="http://schemas.openxmlformats.org/presentationml/2006/main" xmlns:c="http://schemas.openxmlformats.org/drawingml/2006/chart" xmlns:dgm="http://schemas.openxmlformats.org/drawingml/2006/diagram" xmlns:o="urn:schemas-microsoft-com:office:office" xmlns:v="urn:schemas-microsoft-com:vml" xmlns:pvml="urn:schemas-microsoft-com:office:powerpoint" xmlns:com="http://schemas.openxmlformats.org/drawingml/2006/compatibility" xmlns:p14="http://schemas.microsoft.com/office/powerpoint/2010/main" xmlns:p15="http://schemas.microsoft.com/office/powerpoint/2012/main" xmlns:ahyp="http://schemas.microsoft.com/office/drawing/2018/hyperlinkcolor">
+  <p:cSld>
+    <p:bg>
+      <p:bgPr>
+        <a:solidFill>
+          <a:srgbClr val="FAFAFA"/>
+        </a:solidFill>
+      </p:bgPr>
+    </p:bg>
+    <p:spTree>
+      <p:nvGrpSpPr>
+        <p:cNvPr id="226" name="Shape 226"/>
+        <p:cNvGrpSpPr/>
+        <p:nvPr/>
+      </p:nvGrpSpPr>
+      <p:grpSpPr>
+        <a:xfrm>
+          <a:off x="0" y="0"/>
+          <a:ext cx="0" cy="0"/>
+          <a:chOff x="0" y="0"/>
+          <a:chExt cx="0" cy="0"/>
+        </a:xfrm>
+      </p:grpSpPr>
+      <p:sp>
+        <p:nvSpPr>
+          <p:cNvPr id="512" name="Shape 512"/>
+          <p:cNvSpPr txBox="1"/>
+          <p:nvPr/>
+        </p:nvSpPr>
+        <p:spPr>
+          <a:xfrm>
+            <a:off x="640080" y="274320"/>
+            <a:ext cx="7772400" cy="457200"/>
+          </a:xfrm>
+          <a:prstGeom prst="rect">
+            <a:avLst/>
+          </a:prstGeom>
+          <a:noFill/>
+          <a:ln>
+            <a:noFill/>
+          </a:ln>
+        </p:spPr>
+        <p:txBody>
+          <a:bodyPr anchorCtr="0" anchor="t" bIns="45720" lIns="91440" rIns="91440" tIns="45720" wrap="square">
+            <a:noAutofit/>
+          </a:bodyPr>
+          <a:lstStyle/>
+          <a:p>
+            <a:pPr indent="0" lvl="0" marL="0" marR="0" rtl="0" algn="l">
+              <a:lnSpc>
+                <a:spcPct val="100000"/>
+              </a:lnSpc>
+              <a:spcBef>
+                <a:spcPts val="0"/>
+              </a:spcBef>
+              <a:spcAft>
+                <a:spcPts val="0"/>
+              </a:spcAft>
+              <a:buNone/>
+            </a:pPr>
+            <a:r>
+              <a:rPr b="1" i="0" lang="ko" sz="2600" u="none" cap="none" strike="noStrike">
+                <a:solidFill>
+                  <a:srgbClr val="212121"/>
+                </a:solidFill>
+                <a:latin typeface="Arial Black"/>
+                <a:ea typeface="Arial Black"/>
+                <a:cs typeface="Arial Black"/>
+                <a:sym typeface="Arial Black"/>
+              </a:rPr>
+              <a:t>Multimodal RAG: 무엇이 되고 무엇이 안 되는가</a:t>
+            </a:r>
+          </a:p>
+        </p:txBody>
+      </p:sp>
+      <p:sp>
+        <p:nvSpPr>
+          <p:cNvPr id="513" name="Shape 513"/>
+          <p:cNvSpPr txBox="1"/>
+          <p:nvPr/>
+        </p:nvSpPr>
+        <p:spPr>
+          <a:xfrm>
+            <a:off x="640080" y="731520"/>
+            <a:ext cx="7772400" cy="320040"/>
+          </a:xfrm>
+          <a:prstGeom prst="rect">
+            <a:avLst/>
+          </a:prstGeom>
+          <a:noFill/>
+          <a:ln>
+            <a:noFill/>
+          </a:ln>
+        </p:spPr>
+        <p:txBody>
+          <a:bodyPr anchorCtr="0" anchor="t" bIns="45720" lIns="91440" rIns="91440" tIns="45720" wrap="square">
+            <a:noAutofit/>
+          </a:bodyPr>
+          <a:lstStyle/>
+          <a:p>
+            <a:pPr indent="0" lvl="0" marL="0" marR="0" rtl="0" algn="l">
+              <a:lnSpc>
+                <a:spcPct val="100000"/>
+              </a:lnSpc>
+              <a:spcBef>
+                <a:spcPts val="0"/>
+              </a:spcBef>
+              <a:spcAft>
+                <a:spcPts val="0"/>
+              </a:spcAft>
+              <a:buNone/>
+            </a:pPr>
+            <a:r>
+              <a:rPr b="0" i="0" lang="ko" sz="1300" u="none" cap="none" strike="noStrike">
+                <a:solidFill>
+                  <a:srgbClr val="90A4AE"/>
+                </a:solidFill>
+                <a:latin typeface="Arial"/>
+                <a:ea typeface="Arial"/>
+                <a:cs typeface="Arial"/>
+                <a:sym typeface="Arial"/>
+              </a:rPr>
+              <a:t>image-required 27문항 3-way 비교 · 직접 만든 문제로 검증</a:t>
+            </a:r>
+          </a:p>
+        </p:txBody>
+      </p:sp>
+      <p:sp>
+        <p:nvSpPr>
+          <p:cNvPr id="514" name="Shape 514"/>
+          <p:cNvSpPr txBox="1"/>
+          <p:nvPr/>
+        </p:nvSpPr>
+        <p:spPr>
+          <a:xfrm>
+            <a:off x="640080" y="1097280"/>
+            <a:ext cx="1097280" cy="36576"/>
+          </a:xfrm>
+          <a:prstGeom prst="rect">
+            <a:avLst/>
+          </a:prstGeom>
+          <a:solidFill>
+            <a:srgbClr val="1565C0"/>
+          </a:solidFill>
+          <a:ln>
+            <a:noFill/>
+          </a:ln>
+        </p:spPr>
+        <p:txBody>
+          <a:bodyPr anchorCtr="0" anchor="t" bIns="45720" lIns="91440" rIns="91440" tIns="45720" wrap="square">
+            <a:noAutofit/>
+          </a:bodyPr>
+          <a:lstStyle/>
+          <a:p>
+            <a:pPr indent="0" lvl="0" marL="0" marR="0" rtl="0" algn="l">
+              <a:lnSpc>
+                <a:spcPct val="100000"/>
+              </a:lnSpc>
+              <a:spcBef>
+                <a:spcPts val="0"/>
+              </a:spcBef>
+              <a:spcAft>
+                <a:spcPts val="0"/>
+              </a:spcAft>
+              <a:buNone/>
+            </a:pPr>
+          </a:p>
+        </p:txBody>
+      </p:sp>
+      <p:sp>
+        <p:nvSpPr>
+          <p:cNvPr id="515" name="Shape 515"/>
+          <p:cNvSpPr txBox="1"/>
+          <p:nvPr/>
+        </p:nvSpPr>
+        <p:spPr>
+          <a:xfrm>
+            <a:off x="8503920" y="4709160"/>
+            <a:ext cx="457200" cy="320040"/>
+          </a:xfrm>
+          <a:prstGeom prst="rect">
+            <a:avLst/>
+          </a:prstGeom>
+          <a:noFill/>
+          <a:ln>
+            <a:noFill/>
+          </a:ln>
+        </p:spPr>
+        <p:txBody>
+          <a:bodyPr anchorCtr="0" anchor="t" bIns="45720" lIns="91440" rIns="91440" tIns="45720" wrap="square">
+            <a:noAutofit/>
+          </a:bodyPr>
+          <a:lstStyle/>
+          <a:p>
+            <a:pPr indent="0" lvl="0" marL="0" marR="0" rtl="0" algn="r">
+              <a:lnSpc>
+                <a:spcPct val="100000"/>
+              </a:lnSpc>
+              <a:spcBef>
+                <a:spcPts val="0"/>
+              </a:spcBef>
+              <a:spcAft>
+                <a:spcPts val="0"/>
+              </a:spcAft>
+              <a:buNone/>
+            </a:pPr>
+            <a:r>
+              <a:rPr b="0" i="0" lang="ko" sz="1000" u="none" cap="none" strike="noStrike">
+                <a:solidFill>
+                  <a:srgbClr val="90A4AE"/>
+                </a:solidFill>
+                <a:latin typeface="Arial"/>
+                <a:ea typeface="Arial"/>
+                <a:cs typeface="Arial"/>
+                <a:sym typeface="Arial"/>
+              </a:rPr>
+              <a:t>11</a:t>
+            </a:r>
+          </a:p>
+        </p:txBody>
+      </p:sp>
+      <p:sp>
+        <p:nvSpPr>
+          <p:cNvPr id="516" name="Shape 516"/>
+          <p:cNvSpPr txBox="1"/>
+          <p:nvPr/>
+        </p:nvSpPr>
+        <p:spPr>
+          <a:xfrm>
+            <a:off x="457200" y="1417320"/>
+            <a:ext cx="1737360" cy="411480"/>
+          </a:xfrm>
+          <a:prstGeom prst="rect">
+            <a:avLst/>
+          </a:prstGeom>
+          <a:solidFill>
+            <a:srgbClr val="1B2838"/>
+          </a:solidFill>
+          <a:ln>
+            <a:noFill/>
+          </a:ln>
+        </p:spPr>
+        <p:txBody>
+          <a:bodyPr anchorCtr="0" anchor="ctr" bIns="45720" lIns="91440" rIns="91440" tIns="45720" wrap="square">
+            <a:noAutofit/>
+          </a:bodyPr>
+          <a:lstStyle/>
+          <a:p>
+            <a:pPr indent="0" lvl="0" marL="0" marR="0" rtl="0" algn="l">
+              <a:lnSpc>
+                <a:spcPct val="100000"/>
+              </a:lnSpc>
+              <a:spcBef>
+                <a:spcPts val="0"/>
+              </a:spcBef>
+              <a:spcAft>
+                <a:spcPts val="0"/>
+              </a:spcAft>
+              <a:buNone/>
+            </a:pPr>
+            <a:r>
+              <a:rPr b="1" i="0" lang="ko" sz="1000" u="none" cap="none" strike="noStrike">
+                <a:solidFill>
+                  <a:srgbClr val="FFFFFF"/>
+                </a:solidFill>
+                <a:latin typeface="Arial"/>
+                <a:ea typeface="Arial"/>
+                <a:cs typeface="Arial"/>
+                <a:sym typeface="Arial"/>
+              </a:rPr>
+              <a:t>구성</a:t>
+            </a:r>
+          </a:p>
+        </p:txBody>
+      </p:sp>
+      <p:sp>
+        <p:nvSpPr>
+          <p:cNvPr id="517" name="Shape 517"/>
+          <p:cNvSpPr txBox="1"/>
+          <p:nvPr/>
+        </p:nvSpPr>
+        <p:spPr>
+          <a:xfrm>
+            <a:off x="2194560" y="1417320"/>
+            <a:ext cx="1005840" cy="411480"/>
+          </a:xfrm>
+          <a:prstGeom prst="rect">
+            <a:avLst/>
+          </a:prstGeom>
+          <a:solidFill>
+            <a:srgbClr val="1B2838"/>
+          </a:solidFill>
+          <a:ln>
+            <a:noFill/>
+          </a:ln>
+        </p:spPr>
+        <p:txBody>
+          <a:bodyPr anchorCtr="0" anchor="ctr" bIns="45720" lIns="91440" rIns="91440" tIns="45720" wrap="square">
+            <a:noAutofit/>
+          </a:bodyPr>
+          <a:lstStyle/>
+          <a:p>
+            <a:pPr indent="0" lvl="0" marL="0" marR="0" rtl="0" algn="ctr">
+              <a:lnSpc>
+                <a:spcPct val="100000"/>
+              </a:lnSpc>
+              <a:spcBef>
+                <a:spcPts val="0"/>
+              </a:spcBef>
+              <a:spcAft>
+                <a:spcPts val="0"/>
+              </a:spcAft>
+              <a:buNone/>
+            </a:pPr>
+            <a:r>
+              <a:rPr b="1" i="0" lang="ko" sz="1000" u="none" cap="none" strike="noStrike">
+                <a:solidFill>
+                  <a:srgbClr val="FFFFFF"/>
+                </a:solidFill>
+                <a:latin typeface="Arial"/>
+                <a:ea typeface="Arial"/>
+                <a:cs typeface="Arial"/>
+                <a:sym typeface="Arial"/>
+              </a:rPr>
+              <a:t>정답</a:t>
+            </a:r>
+          </a:p>
+        </p:txBody>
+      </p:sp>
+      <p:sp>
+        <p:nvSpPr>
+          <p:cNvPr id="518" name="Shape 518"/>
+          <p:cNvSpPr txBox="1"/>
+          <p:nvPr/>
+        </p:nvSpPr>
+        <p:spPr>
+          <a:xfrm>
+            <a:off x="3200400" y="1417320"/>
+            <a:ext cx="1188720" cy="411480"/>
+          </a:xfrm>
+          <a:prstGeom prst="rect">
+            <a:avLst/>
+          </a:prstGeom>
+          <a:solidFill>
+            <a:srgbClr val="1B2838"/>
+          </a:solidFill>
+          <a:ln>
+            <a:noFill/>
+          </a:ln>
+        </p:spPr>
+        <p:txBody>
+          <a:bodyPr anchorCtr="0" anchor="ctr" bIns="45720" lIns="91440" rIns="91440" tIns="45720" wrap="square">
+            <a:noAutofit/>
+          </a:bodyPr>
+          <a:lstStyle/>
+          <a:p>
+            <a:pPr indent="0" lvl="0" marL="0" marR="0" rtl="0" algn="ctr">
+              <a:lnSpc>
+                <a:spcPct val="100000"/>
+              </a:lnSpc>
+              <a:spcBef>
+                <a:spcPts val="0"/>
+              </a:spcBef>
+              <a:spcAft>
+                <a:spcPts val="0"/>
+              </a:spcAft>
+              <a:buNone/>
+            </a:pPr>
+            <a:r>
+              <a:rPr b="1" i="0" lang="ko" sz="1000" u="none" cap="none" strike="noStrike">
+                <a:solidFill>
+                  <a:srgbClr val="FFFFFF"/>
+                </a:solidFill>
+                <a:latin typeface="Arial"/>
+                <a:ea typeface="Arial"/>
+                <a:cs typeface="Arial"/>
+                <a:sym typeface="Arial"/>
+              </a:rPr>
+              <a:t>정답+부분</a:t>
+            </a:r>
+          </a:p>
+        </p:txBody>
+      </p:sp>
+      <p:sp>
+        <p:nvSpPr>
+          <p:cNvPr id="519" name="Shape 519"/>
+          <p:cNvSpPr txBox="1"/>
+          <p:nvPr/>
+        </p:nvSpPr>
+        <p:spPr>
+          <a:xfrm>
+            <a:off x="4389120" y="1417320"/>
+            <a:ext cx="914400" cy="411480"/>
+          </a:xfrm>
+          <a:prstGeom prst="rect">
+            <a:avLst/>
+          </a:prstGeom>
+          <a:solidFill>
+            <a:srgbClr val="1B2838"/>
+          </a:solidFill>
+          <a:ln>
+            <a:noFill/>
+          </a:ln>
+        </p:spPr>
+        <p:txBody>
+          <a:bodyPr anchorCtr="0" anchor="ctr" bIns="45720" lIns="91440" rIns="91440" tIns="45720" wrap="square">
+            <a:noAutofit/>
+          </a:bodyPr>
+          <a:lstStyle/>
+          <a:p>
+            <a:pPr indent="0" lvl="0" marL="0" marR="0" rtl="0" algn="ctr">
+              <a:lnSpc>
+                <a:spcPct val="100000"/>
+              </a:lnSpc>
+              <a:spcBef>
+                <a:spcPts val="0"/>
+              </a:spcBef>
+              <a:spcAft>
+                <a:spcPts val="0"/>
+              </a:spcAft>
+              <a:buNone/>
+            </a:pPr>
+            <a:r>
+              <a:rPr b="1" i="0" lang="ko" sz="1000" u="none" cap="none" strike="noStrike">
+                <a:solidFill>
+                  <a:srgbClr val="FFFFFF"/>
+                </a:solidFill>
+                <a:latin typeface="Arial"/>
+                <a:ea typeface="Arial"/>
+                <a:cs typeface="Arial"/>
+                <a:sym typeface="Arial"/>
+              </a:rPr>
+              <a:t>거절</a:t>
+            </a:r>
+          </a:p>
+        </p:txBody>
+      </p:sp>
+      <p:sp>
+        <p:nvSpPr>
+          <p:cNvPr id="520" name="Shape 520"/>
+          <p:cNvSpPr txBox="1"/>
+          <p:nvPr/>
+        </p:nvSpPr>
+        <p:spPr>
+          <a:xfrm>
+            <a:off x="457200" y="1828800"/>
+            <a:ext cx="1737360" cy="411480"/>
+          </a:xfrm>
+          <a:prstGeom prst="rect">
+            <a:avLst/>
+          </a:prstGeom>
+          <a:solidFill>
+            <a:srgbClr val="FFFFFF"/>
+          </a:solidFill>
+          <a:ln cap="flat" cmpd="sng" w="12700">
+            <a:solidFill>
+              <a:srgbClr val="90A4AE"/>
+            </a:solidFill>
+            <a:prstDash val="solid"/>
+            <a:round/>
+            <a:headEnd len="sm" w="sm" type="none"/>
+            <a:tailEnd len="sm" w="sm" type="none"/>
+          </a:ln>
+        </p:spPr>
+        <p:txBody>
+          <a:bodyPr anchorCtr="0" anchor="ctr" bIns="45720" lIns="91440" rIns="91440" tIns="45720" wrap="square">
+            <a:noAutofit/>
+          </a:bodyPr>
+          <a:lstStyle/>
+          <a:p>
+            <a:pPr indent="0" lvl="0" marL="0" marR="0" rtl="0" algn="l">
+              <a:lnSpc>
+                <a:spcPct val="100000"/>
+              </a:lnSpc>
+              <a:spcBef>
+                <a:spcPts val="0"/>
+              </a:spcBef>
+              <a:spcAft>
+                <a:spcPts val="0"/>
+              </a:spcAft>
+              <a:buNone/>
+            </a:pPr>
+            <a:r>
+              <a:rPr b="1" i="0" lang="ko" sz="1000" u="none" cap="none" strike="noStrike">
+                <a:solidFill>
+                  <a:srgbClr val="212121"/>
+                </a:solidFill>
+                <a:latin typeface="Arial"/>
+                <a:ea typeface="Arial"/>
+                <a:cs typeface="Arial"/>
+                <a:sym typeface="Arial"/>
+              </a:rPr>
+              <a:t>C0  텍스트만</a:t>
+            </a:r>
+          </a:p>
+        </p:txBody>
+      </p:sp>
+      <p:sp>
+        <p:nvSpPr>
+          <p:cNvPr id="521" name="Shape 521"/>
+          <p:cNvSpPr txBox="1"/>
+          <p:nvPr/>
+        </p:nvSpPr>
+        <p:spPr>
+          <a:xfrm>
+            <a:off x="2194560" y="1828800"/>
+            <a:ext cx="1005840" cy="411480"/>
+          </a:xfrm>
+          <a:prstGeom prst="rect">
+            <a:avLst/>
+          </a:prstGeom>
+          <a:solidFill>
+            <a:srgbClr val="FFFFFF"/>
+          </a:solidFill>
+          <a:ln cap="flat" cmpd="sng" w="12700">
+            <a:solidFill>
+              <a:srgbClr val="90A4AE"/>
+            </a:solidFill>
+            <a:prstDash val="solid"/>
+            <a:round/>
+            <a:headEnd len="sm" w="sm" type="none"/>
+            <a:tailEnd len="sm" w="sm" type="none"/>
+          </a:ln>
+        </p:spPr>
+        <p:txBody>
+          <a:bodyPr anchorCtr="0" anchor="ctr" bIns="45720" lIns="91440" rIns="91440" tIns="45720" wrap="square">
+            <a:noAutofit/>
+          </a:bodyPr>
+          <a:lstStyle/>
+          <a:p>
+            <a:pPr indent="0" lvl="0" marL="0" marR="0" rtl="0" algn="ctr">
+              <a:lnSpc>
+                <a:spcPct val="100000"/>
+              </a:lnSpc>
+              <a:spcBef>
+                <a:spcPts val="0"/>
+              </a:spcBef>
+              <a:spcAft>
+                <a:spcPts val="0"/>
+              </a:spcAft>
+              <a:buNone/>
+            </a:pPr>
+            <a:r>
+              <a:rPr b="0" i="0" lang="ko" sz="1000" u="none" cap="none" strike="noStrike">
+                <a:solidFill>
+                  <a:srgbClr val="212121"/>
+                </a:solidFill>
+                <a:latin typeface="Arial"/>
+                <a:ea typeface="Arial"/>
+                <a:cs typeface="Arial"/>
+                <a:sym typeface="Arial"/>
+              </a:rPr>
+              <a:t>0/27</a:t>
+            </a:r>
+          </a:p>
+        </p:txBody>
+      </p:sp>
+      <p:sp>
+        <p:nvSpPr>
+          <p:cNvPr id="522" name="Shape 522"/>
+          <p:cNvSpPr txBox="1"/>
+          <p:nvPr/>
+        </p:nvSpPr>
+        <p:spPr>
+          <a:xfrm>
+            <a:off x="3200400" y="1828800"/>
+            <a:ext cx="1188720" cy="411480"/>
+          </a:xfrm>
+          <a:prstGeom prst="rect">
+            <a:avLst/>
+          </a:prstGeom>
+          <a:solidFill>
+            <a:srgbClr val="FFFFFF"/>
+          </a:solidFill>
+          <a:ln cap="flat" cmpd="sng" w="12700">
+            <a:solidFill>
+              <a:srgbClr val="90A4AE"/>
+            </a:solidFill>
+            <a:prstDash val="solid"/>
+            <a:round/>
+            <a:headEnd len="sm" w="sm" type="none"/>
+            <a:tailEnd len="sm" w="sm" type="none"/>
+          </a:ln>
+        </p:spPr>
+        <p:txBody>
+          <a:bodyPr anchorCtr="0" anchor="ctr" bIns="45720" lIns="91440" rIns="91440" tIns="45720" wrap="square">
+            <a:noAutofit/>
+          </a:bodyPr>
+          <a:lstStyle/>
+          <a:p>
+            <a:pPr indent="0" lvl="0" marL="0" marR="0" rtl="0" algn="ctr">
+              <a:lnSpc>
+                <a:spcPct val="100000"/>
+              </a:lnSpc>
+              <a:spcBef>
+                <a:spcPts val="0"/>
+              </a:spcBef>
+              <a:spcAft>
+                <a:spcPts val="0"/>
+              </a:spcAft>
+              <a:buNone/>
+            </a:pPr>
+            <a:r>
+              <a:rPr b="0" i="0" lang="ko" sz="1000" u="none" cap="none" strike="noStrike">
+                <a:solidFill>
+                  <a:srgbClr val="212121"/>
+                </a:solidFill>
+                <a:latin typeface="Arial"/>
+                <a:ea typeface="Arial"/>
+                <a:cs typeface="Arial"/>
+                <a:sym typeface="Arial"/>
+              </a:rPr>
+              <a:t>0/27</a:t>
+            </a:r>
+          </a:p>
+        </p:txBody>
+      </p:sp>
+      <p:sp>
+        <p:nvSpPr>
+          <p:cNvPr id="523" name="Shape 523"/>
+          <p:cNvSpPr txBox="1"/>
+          <p:nvPr/>
+        </p:nvSpPr>
+        <p:spPr>
+          <a:xfrm>
+            <a:off x="4389120" y="1828800"/>
+            <a:ext cx="914400" cy="411480"/>
+          </a:xfrm>
+          <a:prstGeom prst="rect">
+            <a:avLst/>
+          </a:prstGeom>
+          <a:solidFill>
+            <a:srgbClr val="FFFFFF"/>
+          </a:solidFill>
+          <a:ln cap="flat" cmpd="sng" w="12700">
+            <a:solidFill>
+              <a:srgbClr val="90A4AE"/>
+            </a:solidFill>
+            <a:prstDash val="solid"/>
+            <a:round/>
+            <a:headEnd len="sm" w="sm" type="none"/>
+            <a:tailEnd len="sm" w="sm" type="none"/>
+          </a:ln>
+        </p:spPr>
+        <p:txBody>
+          <a:bodyPr anchorCtr="0" anchor="ctr" bIns="45720" lIns="91440" rIns="91440" tIns="45720" wrap="square">
+            <a:noAutofit/>
+          </a:bodyPr>
+          <a:lstStyle/>
+          <a:p>
+            <a:pPr indent="0" lvl="0" marL="0" marR="0" rtl="0" algn="ctr">
+              <a:lnSpc>
+                <a:spcPct val="100000"/>
+              </a:lnSpc>
+              <a:spcBef>
+                <a:spcPts val="0"/>
+              </a:spcBef>
+              <a:spcAft>
+                <a:spcPts val="0"/>
+              </a:spcAft>
+              <a:buNone/>
+            </a:pPr>
+            <a:r>
+              <a:rPr b="0" i="0" lang="ko" sz="1000" u="none" cap="none" strike="noStrike">
+                <a:solidFill>
+                  <a:srgbClr val="212121"/>
+                </a:solidFill>
+                <a:latin typeface="Arial"/>
+                <a:ea typeface="Arial"/>
+                <a:cs typeface="Arial"/>
+                <a:sym typeface="Arial"/>
+              </a:rPr>
+              <a:t>23</a:t>
+            </a:r>
+          </a:p>
+        </p:txBody>
+      </p:sp>
+      <p:sp>
+        <p:nvSpPr>
+          <p:cNvPr id="524" name="Shape 524"/>
+          <p:cNvSpPr txBox="1"/>
+          <p:nvPr/>
+        </p:nvSpPr>
+        <p:spPr>
+          <a:xfrm>
+            <a:off x="457200" y="2240280"/>
+            <a:ext cx="1737360" cy="411480"/>
+          </a:xfrm>
+          <a:prstGeom prst="rect">
+            <a:avLst/>
+          </a:prstGeom>
+          <a:solidFill>
+            <a:srgbClr val="FFFFFF"/>
+          </a:solidFill>
+          <a:ln cap="flat" cmpd="sng" w="12700">
+            <a:solidFill>
+              <a:srgbClr val="90A4AE"/>
+            </a:solidFill>
+            <a:prstDash val="solid"/>
+            <a:round/>
+            <a:headEnd len="sm" w="sm" type="none"/>
+            <a:tailEnd len="sm" w="sm" type="none"/>
+          </a:ln>
+        </p:spPr>
+        <p:txBody>
+          <a:bodyPr anchorCtr="0" anchor="ctr" bIns="45720" lIns="91440" rIns="91440" tIns="45720" wrap="square">
+            <a:noAutofit/>
+          </a:bodyPr>
+          <a:lstStyle/>
+          <a:p>
+            <a:pPr indent="0" lvl="0" marL="0" marR="0" rtl="0" algn="l">
+              <a:lnSpc>
+                <a:spcPct val="100000"/>
+              </a:lnSpc>
+              <a:spcBef>
+                <a:spcPts val="0"/>
+              </a:spcBef>
+              <a:spcAft>
+                <a:spcPts val="0"/>
+              </a:spcAft>
+              <a:buNone/>
+            </a:pPr>
+            <a:r>
+              <a:rPr b="1" i="0" lang="ko" sz="1000" u="none" cap="none" strike="noStrike">
+                <a:solidFill>
+                  <a:srgbClr val="212121"/>
+                </a:solidFill>
+                <a:latin typeface="Arial"/>
+                <a:ea typeface="Arial"/>
+                <a:cs typeface="Arial"/>
+                <a:sym typeface="Arial"/>
+              </a:rPr>
+              <a:t>C1page  페이지 캡션</a:t>
+            </a:r>
+          </a:p>
+        </p:txBody>
+      </p:sp>
+      <p:sp>
+        <p:nvSpPr>
+          <p:cNvPr id="525" name="Shape 525"/>
+          <p:cNvSpPr txBox="1"/>
+          <p:nvPr/>
+        </p:nvSpPr>
+        <p:spPr>
+          <a:xfrm>
+            <a:off x="2194560" y="2240280"/>
+            <a:ext cx="1005840" cy="411480"/>
+          </a:xfrm>
+          <a:prstGeom prst="rect">
+            <a:avLst/>
+          </a:prstGeom>
+          <a:solidFill>
+            <a:srgbClr val="FFFFFF"/>
+          </a:solidFill>
+          <a:ln cap="flat" cmpd="sng" w="12700">
+            <a:solidFill>
+              <a:srgbClr val="90A4AE"/>
+            </a:solidFill>
+            <a:prstDash val="solid"/>
+            <a:round/>
+            <a:headEnd len="sm" w="sm" type="none"/>
+            <a:tailEnd len="sm" w="sm" type="none"/>
+          </a:ln>
+        </p:spPr>
+        <p:txBody>
+          <a:bodyPr anchorCtr="0" anchor="ctr" bIns="45720" lIns="91440" rIns="91440" tIns="45720" wrap="square">
+            <a:noAutofit/>
+          </a:bodyPr>
+          <a:lstStyle/>
+          <a:p>
+            <a:pPr indent="0" lvl="0" marL="0" marR="0" rtl="0" algn="ctr">
+              <a:lnSpc>
+                <a:spcPct val="100000"/>
+              </a:lnSpc>
+              <a:spcBef>
+                <a:spcPts val="0"/>
+              </a:spcBef>
+              <a:spcAft>
+                <a:spcPts val="0"/>
+              </a:spcAft>
+              <a:buNone/>
+            </a:pPr>
+            <a:r>
+              <a:rPr b="0" i="0" lang="ko" sz="1000" u="none" cap="none" strike="noStrike">
+                <a:solidFill>
+                  <a:srgbClr val="212121"/>
+                </a:solidFill>
+                <a:latin typeface="Arial"/>
+                <a:ea typeface="Arial"/>
+                <a:cs typeface="Arial"/>
+                <a:sym typeface="Arial"/>
+              </a:rPr>
+              <a:t>1/27</a:t>
+            </a:r>
+          </a:p>
+        </p:txBody>
+      </p:sp>
+      <p:sp>
+        <p:nvSpPr>
+          <p:cNvPr id="526" name="Shape 526"/>
+          <p:cNvSpPr txBox="1"/>
+          <p:nvPr/>
+        </p:nvSpPr>
+        <p:spPr>
+          <a:xfrm>
+            <a:off x="3200400" y="2240280"/>
+            <a:ext cx="1188720" cy="411480"/>
+          </a:xfrm>
+          <a:prstGeom prst="rect">
+            <a:avLst/>
+          </a:prstGeom>
+          <a:solidFill>
+            <a:srgbClr val="FFFFFF"/>
+          </a:solidFill>
+          <a:ln cap="flat" cmpd="sng" w="12700">
+            <a:solidFill>
+              <a:srgbClr val="90A4AE"/>
+            </a:solidFill>
+            <a:prstDash val="solid"/>
+            <a:round/>
+            <a:headEnd len="sm" w="sm" type="none"/>
+            <a:tailEnd len="sm" w="sm" type="none"/>
+          </a:ln>
+        </p:spPr>
+        <p:txBody>
+          <a:bodyPr anchorCtr="0" anchor="ctr" bIns="45720" lIns="91440" rIns="91440" tIns="45720" wrap="square">
+            <a:noAutofit/>
+          </a:bodyPr>
+          <a:lstStyle/>
+          <a:p>
+            <a:pPr indent="0" lvl="0" marL="0" marR="0" rtl="0" algn="ctr">
+              <a:lnSpc>
+                <a:spcPct val="100000"/>
+              </a:lnSpc>
+              <a:spcBef>
+                <a:spcPts val="0"/>
+              </a:spcBef>
+              <a:spcAft>
+                <a:spcPts val="0"/>
+              </a:spcAft>
+              <a:buNone/>
+            </a:pPr>
+            <a:r>
+              <a:rPr b="0" i="0" lang="ko" sz="1000" u="none" cap="none" strike="noStrike">
+                <a:solidFill>
+                  <a:srgbClr val="212121"/>
+                </a:solidFill>
+                <a:latin typeface="Arial"/>
+                <a:ea typeface="Arial"/>
+                <a:cs typeface="Arial"/>
+                <a:sym typeface="Arial"/>
+              </a:rPr>
+              <a:t>5/27</a:t>
+            </a:r>
+          </a:p>
+        </p:txBody>
+      </p:sp>
+      <p:sp>
+        <p:nvSpPr>
+          <p:cNvPr id="527" name="Shape 527"/>
+          <p:cNvSpPr txBox="1"/>
+          <p:nvPr/>
+        </p:nvSpPr>
+        <p:spPr>
+          <a:xfrm>
+            <a:off x="4389120" y="2240280"/>
+            <a:ext cx="914400" cy="411480"/>
+          </a:xfrm>
+          <a:prstGeom prst="rect">
+            <a:avLst/>
+          </a:prstGeom>
+          <a:solidFill>
+            <a:srgbClr val="FFFFFF"/>
+          </a:solidFill>
+          <a:ln cap="flat" cmpd="sng" w="12700">
+            <a:solidFill>
+              <a:srgbClr val="90A4AE"/>
+            </a:solidFill>
+            <a:prstDash val="solid"/>
+            <a:round/>
+            <a:headEnd len="sm" w="sm" type="none"/>
+            <a:tailEnd len="sm" w="sm" type="none"/>
+          </a:ln>
+        </p:spPr>
+        <p:txBody>
+          <a:bodyPr anchorCtr="0" anchor="ctr" bIns="45720" lIns="91440" rIns="91440" tIns="45720" wrap="square">
+            <a:noAutofit/>
+          </a:bodyPr>
+          <a:lstStyle/>
+          <a:p>
+            <a:pPr indent="0" lvl="0" marL="0" marR="0" rtl="0" algn="ctr">
+              <a:lnSpc>
+                <a:spcPct val="100000"/>
+              </a:lnSpc>
+              <a:spcBef>
+                <a:spcPts val="0"/>
+              </a:spcBef>
+              <a:spcAft>
+                <a:spcPts val="0"/>
+              </a:spcAft>
+              <a:buNone/>
+            </a:pPr>
+            <a:r>
+              <a:rPr b="0" i="0" lang="ko" sz="1000" u="none" cap="none" strike="noStrike">
+                <a:solidFill>
+                  <a:srgbClr val="212121"/>
+                </a:solidFill>
+                <a:latin typeface="Arial"/>
+                <a:ea typeface="Arial"/>
+                <a:cs typeface="Arial"/>
+                <a:sym typeface="Arial"/>
+              </a:rPr>
+              <a:t>17</a:t>
+            </a:r>
+          </a:p>
+        </p:txBody>
+      </p:sp>
+      <p:sp>
+        <p:nvSpPr>
+          <p:cNvPr id="528" name="Shape 528"/>
+          <p:cNvSpPr txBox="1"/>
+          <p:nvPr/>
+        </p:nvSpPr>
+        <p:spPr>
+          <a:xfrm>
+            <a:off x="457200" y="2651760"/>
+            <a:ext cx="1737360" cy="411480"/>
+          </a:xfrm>
+          <a:prstGeom prst="rect">
+            <a:avLst/>
+          </a:prstGeom>
+          <a:solidFill>
+            <a:srgbClr val="E3F2FD"/>
+          </a:solidFill>
+          <a:ln cap="flat" cmpd="sng" w="12700">
+            <a:solidFill>
+              <a:srgbClr val="90A4AE"/>
+            </a:solidFill>
+            <a:prstDash val="solid"/>
+            <a:round/>
+            <a:headEnd len="sm" w="sm" type="none"/>
+            <a:tailEnd len="sm" w="sm" type="none"/>
+          </a:ln>
+        </p:spPr>
+        <p:txBody>
+          <a:bodyPr anchorCtr="0" anchor="ctr" bIns="45720" lIns="91440" rIns="91440" tIns="45720" wrap="square">
+            <a:noAutofit/>
+          </a:bodyPr>
+          <a:lstStyle/>
+          <a:p>
+            <a:pPr indent="0" lvl="0" marL="0" marR="0" rtl="0" algn="l">
+              <a:lnSpc>
+                <a:spcPct val="100000"/>
+              </a:lnSpc>
+              <a:spcBef>
+                <a:spcPts val="0"/>
+              </a:spcBef>
+              <a:spcAft>
+                <a:spcPts val="0"/>
+              </a:spcAft>
+              <a:buNone/>
+            </a:pPr>
+            <a:r>
+              <a:rPr b="1" i="0" lang="ko" sz="1000" u="none" cap="none" strike="noStrike">
+                <a:solidFill>
+                  <a:srgbClr val="1565C0"/>
+                </a:solidFill>
+                <a:latin typeface="Arial"/>
+                <a:ea typeface="Arial"/>
+                <a:cs typeface="Arial"/>
+                <a:sym typeface="Arial"/>
+              </a:rPr>
+              <a:t>C1region  영역 캡션</a:t>
+            </a:r>
+          </a:p>
+        </p:txBody>
+      </p:sp>
+      <p:sp>
+        <p:nvSpPr>
+          <p:cNvPr id="529" name="Shape 529"/>
+          <p:cNvSpPr txBox="1"/>
+          <p:nvPr/>
+        </p:nvSpPr>
+        <p:spPr>
+          <a:xfrm>
+            <a:off x="2194560" y="2651760"/>
+            <a:ext cx="1005840" cy="411480"/>
+          </a:xfrm>
+          <a:prstGeom prst="rect">
+            <a:avLst/>
+          </a:prstGeom>
+          <a:solidFill>
+            <a:srgbClr val="E3F2FD"/>
+          </a:solidFill>
+          <a:ln cap="flat" cmpd="sng" w="12700">
+            <a:solidFill>
+              <a:srgbClr val="90A4AE"/>
+            </a:solidFill>
+            <a:prstDash val="solid"/>
+            <a:round/>
+            <a:headEnd len="sm" w="sm" type="none"/>
+            <a:tailEnd len="sm" w="sm" type="none"/>
+          </a:ln>
+        </p:spPr>
+        <p:txBody>
+          <a:bodyPr anchorCtr="0" anchor="ctr" bIns="45720" lIns="91440" rIns="91440" tIns="45720" wrap="square">
+            <a:noAutofit/>
+          </a:bodyPr>
+          <a:lstStyle/>
+          <a:p>
+            <a:pPr indent="0" lvl="0" marL="0" marR="0" rtl="0" algn="ctr">
+              <a:lnSpc>
+                <a:spcPct val="100000"/>
+              </a:lnSpc>
+              <a:spcBef>
+                <a:spcPts val="0"/>
+              </a:spcBef>
+              <a:spcAft>
+                <a:spcPts val="0"/>
+              </a:spcAft>
+              <a:buNone/>
+            </a:pPr>
+            <a:r>
+              <a:rPr b="1" i="0" lang="ko" sz="1000" u="none" cap="none" strike="noStrike">
+                <a:solidFill>
+                  <a:srgbClr val="1565C0"/>
+                </a:solidFill>
+                <a:latin typeface="Arial"/>
+                <a:ea typeface="Arial"/>
+                <a:cs typeface="Arial"/>
+                <a:sym typeface="Arial"/>
+              </a:rPr>
+              <a:t>8/27</a:t>
+            </a:r>
+          </a:p>
+        </p:txBody>
+      </p:sp>
+      <p:sp>
+        <p:nvSpPr>
+          <p:cNvPr id="530" name="Shape 530"/>
+          <p:cNvSpPr txBox="1"/>
+          <p:nvPr/>
+        </p:nvSpPr>
+        <p:spPr>
+          <a:xfrm>
+            <a:off x="3200400" y="2651760"/>
+            <a:ext cx="1188720" cy="411480"/>
+          </a:xfrm>
+          <a:prstGeom prst="rect">
+            <a:avLst/>
+          </a:prstGeom>
+          <a:solidFill>
+            <a:srgbClr val="E3F2FD"/>
+          </a:solidFill>
+          <a:ln cap="flat" cmpd="sng" w="12700">
+            <a:solidFill>
+              <a:srgbClr val="90A4AE"/>
+            </a:solidFill>
+            <a:prstDash val="solid"/>
+            <a:round/>
+            <a:headEnd len="sm" w="sm" type="none"/>
+            <a:tailEnd len="sm" w="sm" type="none"/>
+          </a:ln>
+        </p:spPr>
+        <p:txBody>
+          <a:bodyPr anchorCtr="0" anchor="ctr" bIns="45720" lIns="91440" rIns="91440" tIns="45720" wrap="square">
+            <a:noAutofit/>
+          </a:bodyPr>
+          <a:lstStyle/>
+          <a:p>
+            <a:pPr indent="0" lvl="0" marL="0" marR="0" rtl="0" algn="ctr">
+              <a:lnSpc>
+                <a:spcPct val="100000"/>
+              </a:lnSpc>
+              <a:spcBef>
+                <a:spcPts val="0"/>
+              </a:spcBef>
+              <a:spcAft>
+                <a:spcPts val="0"/>
+              </a:spcAft>
+              <a:buNone/>
+            </a:pPr>
+            <a:r>
+              <a:rPr b="1" i="0" lang="ko" sz="1000" u="none" cap="none" strike="noStrike">
+                <a:solidFill>
+                  <a:srgbClr val="1565C0"/>
+                </a:solidFill>
+                <a:latin typeface="Arial"/>
+                <a:ea typeface="Arial"/>
+                <a:cs typeface="Arial"/>
+                <a:sym typeface="Arial"/>
+              </a:rPr>
+              <a:t>12/27</a:t>
+            </a:r>
+          </a:p>
+        </p:txBody>
+      </p:sp>
+      <p:sp>
+        <p:nvSpPr>
+          <p:cNvPr id="531" name="Shape 531"/>
+          <p:cNvSpPr txBox="1"/>
+          <p:nvPr/>
+        </p:nvSpPr>
+        <p:spPr>
+          <a:xfrm>
+            <a:off x="4389120" y="2651760"/>
+            <a:ext cx="914400" cy="411480"/>
+          </a:xfrm>
+          <a:prstGeom prst="rect">
+            <a:avLst/>
+          </a:prstGeom>
+          <a:solidFill>
+            <a:srgbClr val="E3F2FD"/>
+          </a:solidFill>
+          <a:ln cap="flat" cmpd="sng" w="12700">
+            <a:solidFill>
+              <a:srgbClr val="90A4AE"/>
+            </a:solidFill>
+            <a:prstDash val="solid"/>
+            <a:round/>
+            <a:headEnd len="sm" w="sm" type="none"/>
+            <a:tailEnd len="sm" w="sm" type="none"/>
+          </a:ln>
+        </p:spPr>
+        <p:txBody>
+          <a:bodyPr anchorCtr="0" anchor="ctr" bIns="45720" lIns="91440" rIns="91440" tIns="45720" wrap="square">
+            <a:noAutofit/>
+          </a:bodyPr>
+          <a:lstStyle/>
+          <a:p>
+            <a:pPr indent="0" lvl="0" marL="0" marR="0" rtl="0" algn="ctr">
+              <a:lnSpc>
+                <a:spcPct val="100000"/>
+              </a:lnSpc>
+              <a:spcBef>
+                <a:spcPts val="0"/>
+              </a:spcBef>
+              <a:spcAft>
+                <a:spcPts val="0"/>
+              </a:spcAft>
+              <a:buNone/>
+            </a:pPr>
+            <a:r>
+              <a:rPr b="1" i="0" lang="ko" sz="1000" u="none" cap="none" strike="noStrike">
+                <a:solidFill>
+                  <a:srgbClr val="1565C0"/>
+                </a:solidFill>
+                <a:latin typeface="Arial"/>
+                <a:ea typeface="Arial"/>
+                <a:cs typeface="Arial"/>
+                <a:sym typeface="Arial"/>
+              </a:rPr>
+              <a:t>13</a:t>
+            </a:r>
+          </a:p>
+        </p:txBody>
+      </p:sp>
+      <p:sp>
+        <p:nvSpPr>
+          <p:cNvPr id="532" name="Shape 532"/>
+          <p:cNvSpPr txBox="1"/>
+          <p:nvPr/>
+        </p:nvSpPr>
+        <p:spPr>
+          <a:xfrm>
+            <a:off x="5303520" y="1417320"/>
+            <a:ext cx="3383280" cy="1645920"/>
+          </a:xfrm>
+          <a:prstGeom prst="rect">
+            <a:avLst/>
+          </a:prstGeom>
+          <a:solidFill>
+            <a:srgbClr val="FFFFFF"/>
+          </a:solidFill>
+          <a:ln cap="flat" cmpd="sng" w="12700">
+            <a:solidFill>
+              <a:srgbClr val="90A4AE"/>
+            </a:solidFill>
+            <a:prstDash val="solid"/>
+            <a:round/>
+            <a:headEnd len="sm" w="sm" type="none"/>
+            <a:tailEnd len="sm" w="sm" type="none"/>
+          </a:ln>
+        </p:spPr>
+        <p:txBody>
+          <a:bodyPr anchorCtr="0" anchor="t" bIns="45720" lIns="91440" rIns="91440" tIns="45720" wrap="square">
+            <a:noAutofit/>
+          </a:bodyPr>
+          <a:lstStyle/>
+          <a:p>
+            <a:pPr indent="0" lvl="0" marL="0" marR="0" rtl="0" algn="l">
+              <a:lnSpc>
+                <a:spcPct val="100000"/>
+              </a:lnSpc>
+              <a:spcBef>
+                <a:spcPts val="200"/>
+              </a:spcBef>
+              <a:spcAft>
+                <a:spcPts val="0"/>
+              </a:spcAft>
+              <a:buNone/>
+            </a:pPr>
+            <a:r>
+              <a:rPr b="1" i="0" lang="ko" sz="1100" u="none" cap="none" strike="noStrike">
+                <a:solidFill>
+                  <a:srgbClr val="E65100"/>
+                </a:solidFill>
+                <a:latin typeface="Arial"/>
+                <a:ea typeface="Arial"/>
+                <a:cs typeface="Arial"/>
+                <a:sym typeface="Arial"/>
+              </a:rPr>
+              <a:t>정직한 한계</a:t>
+            </a:r>
+          </a:p>
+          <a:p>
+            <a:pPr indent="0" lvl="0" marL="0" marR="0" rtl="0" algn="l">
+              <a:lnSpc>
+                <a:spcPct val="100000"/>
+              </a:lnSpc>
+              <a:spcBef>
+                <a:spcPts val="500"/>
+              </a:spcBef>
+              <a:spcAft>
+                <a:spcPts val="0"/>
+              </a:spcAft>
+              <a:buNone/>
+            </a:pPr>
+            <a:r>
+              <a:rPr b="0" i="0" lang="ko" sz="950" u="none" cap="none" strike="noStrike">
+                <a:solidFill>
+                  <a:srgbClr val="212121"/>
+                </a:solidFill>
+                <a:latin typeface="Arial"/>
+                <a:ea typeface="Arial"/>
+                <a:cs typeface="Arial"/>
+                <a:sym typeface="Arial"/>
+              </a:rPr>
+              <a:t>· 이득은 아이콘에 집중 (8문항 중 6)</a:t>
+            </a:r>
+          </a:p>
+          <a:p>
+            <a:pPr indent="0" lvl="0" marL="0" marR="0" rtl="0" algn="l">
+              <a:lnSpc>
+                <a:spcPct val="100000"/>
+              </a:lnSpc>
+              <a:spcBef>
+                <a:spcPts val="300"/>
+              </a:spcBef>
+              <a:spcAft>
+                <a:spcPts val="0"/>
+              </a:spcAft>
+              <a:buNone/>
+            </a:pPr>
+            <a:r>
+              <a:rPr b="0" i="0" lang="ko" sz="950" u="none" cap="none" strike="noStrike">
+                <a:solidFill>
+                  <a:srgbClr val="212121"/>
+                </a:solidFill>
+                <a:latin typeface="Arial"/>
+                <a:ea typeface="Arial"/>
+                <a:cs typeface="Arial"/>
+                <a:sym typeface="Arial"/>
+              </a:rPr>
+              <a:t>· 방향 유형은 세 구성 모두 0/4</a:t>
+            </a:r>
+          </a:p>
+          <a:p>
+            <a:pPr indent="0" lvl="0" marL="0" marR="0" rtl="0" algn="l">
+              <a:lnSpc>
+                <a:spcPct val="100000"/>
+              </a:lnSpc>
+              <a:spcBef>
+                <a:spcPts val="300"/>
+              </a:spcBef>
+              <a:spcAft>
+                <a:spcPts val="0"/>
+              </a:spcAft>
+              <a:buNone/>
+            </a:pPr>
+            <a:r>
+              <a:rPr b="0" i="0" lang="ko" sz="950" u="none" cap="none" strike="noStrike">
+                <a:solidFill>
+                  <a:srgbClr val="212121"/>
+                </a:solidFill>
+                <a:latin typeface="Arial"/>
+                <a:ea typeface="Arial"/>
+                <a:cs typeface="Arial"/>
+                <a:sym typeface="Arial"/>
+              </a:rPr>
+              <a:t>· 표본 27문항, 채점자 = 작성자</a:t>
+            </a:r>
+          </a:p>
+          <a:p>
+            <a:pPr indent="0" lvl="0" marL="0" marR="0" rtl="0" algn="l">
+              <a:lnSpc>
+                <a:spcPct val="100000"/>
+              </a:lnSpc>
+              <a:spcBef>
+                <a:spcPts val="300"/>
+              </a:spcBef>
+              <a:spcAft>
+                <a:spcPts val="0"/>
+              </a:spcAft>
+              <a:buNone/>
+            </a:pPr>
+            <a:r>
+              <a:rPr b="0" i="0" lang="ko" sz="950" u="none" cap="none" strike="noStrike">
+                <a:solidFill>
+                  <a:srgbClr val="212121"/>
+                </a:solidFill>
+                <a:latin typeface="Arial"/>
+                <a:ea typeface="Arial"/>
+                <a:cs typeface="Arial"/>
+                <a:sym typeface="Arial"/>
+              </a:rPr>
+              <a:t>· 영역 캡션은 15페이지에만 존재</a:t>
+            </a:r>
+          </a:p>
+        </p:txBody>
+      </p:sp>
+      <p:sp>
+        <p:nvSpPr>
+          <p:cNvPr id="533" name="Shape 533"/>
+          <p:cNvSpPr txBox="1"/>
+          <p:nvPr/>
+        </p:nvSpPr>
+        <p:spPr>
+          <a:xfrm>
+            <a:off x="457200" y="3200400"/>
+            <a:ext cx="8229600" cy="731520"/>
+          </a:xfrm>
+          <a:prstGeom prst="rect">
+            <a:avLst/>
+          </a:prstGeom>
+          <a:solidFill>
+            <a:srgbClr val="E3F2FD"/>
+          </a:solidFill>
+          <a:ln>
+            <a:noFill/>
+          </a:ln>
+        </p:spPr>
+        <p:txBody>
+          <a:bodyPr anchorCtr="0" anchor="ctr" bIns="45720" lIns="91440" rIns="91440" tIns="45720" wrap="square">
+            <a:noAutofit/>
+          </a:bodyPr>
+          <a:lstStyle/>
+          <a:p>
+            <a:pPr indent="0" lvl="0" marL="0" marR="0" rtl="0" algn="l">
+              <a:lnSpc>
+                <a:spcPct val="100000"/>
+              </a:lnSpc>
+              <a:spcBef>
+                <a:spcPts val="0"/>
+              </a:spcBef>
+              <a:spcAft>
+                <a:spcPts val="0"/>
+              </a:spcAft>
+              <a:buNone/>
+            </a:pPr>
+            <a:r>
+              <a:rPr b="1" i="0" lang="ko" sz="1000" u="none" cap="none" strike="noStrike">
+                <a:solidFill>
+                  <a:srgbClr val="1565C0"/>
+                </a:solidFill>
+                <a:latin typeface="Arial"/>
+                <a:ea typeface="Arial"/>
+                <a:cs typeface="Arial"/>
+                <a:sym typeface="Arial"/>
+              </a:rPr>
+              <a:t>실패 분석 — 근거가 있는데 답하지 못한 6건을 컨텍스트 고정 후 생성만 재실행하여 분해</a:t>
+            </a:r>
+          </a:p>
+          <a:p>
+            <a:pPr indent="0" lvl="0" marL="0" marR="0" rtl="0" algn="l">
+              <a:lnSpc>
+                <a:spcPct val="100000"/>
+              </a:lnSpc>
+              <a:spcBef>
+                <a:spcPts val="250"/>
+              </a:spcBef>
+              <a:spcAft>
+                <a:spcPts val="0"/>
+              </a:spcAft>
+              <a:buNone/>
+            </a:pPr>
+            <a:r>
+              <a:rPr b="0" i="0" lang="ko" sz="950" u="none" cap="none" strike="noStrike">
+                <a:solidFill>
+                  <a:srgbClr val="212121"/>
+                </a:solidFill>
+                <a:latin typeface="Arial"/>
+                <a:ea typeface="Arial"/>
+                <a:cs typeface="Arial"/>
+                <a:sym typeface="Arial"/>
+              </a:rPr>
+              <a:t>프롬프트 개선은 거절을 13→2로 줄였지만 틀린 회전 방향을 자신 있게 답하고 타 제품 수치를 끌어오는 환각을 만들어 기각 · 파이프라인 미변경</a:t>
+            </a:r>
+          </a:p>
+        </p:txBody>
+      </p:sp>
+      <p:sp>
+        <p:nvSpPr>
+          <p:cNvPr id="534" name="Shape 534"/>
+          <p:cNvSpPr txBox="1"/>
+          <p:nvPr/>
+        </p:nvSpPr>
+        <p:spPr>
+          <a:xfrm>
+            <a:off x="457200" y="4084320"/>
+            <a:ext cx="8229600" cy="411480"/>
+          </a:xfrm>
+          <a:prstGeom prst="rect">
+            <a:avLst/>
+          </a:prstGeom>
+          <a:noFill/>
+          <a:ln>
+            <a:noFill/>
+          </a:ln>
+        </p:spPr>
+        <p:txBody>
+          <a:bodyPr anchorCtr="0" anchor="ctr" bIns="45720" lIns="91440" rIns="91440" tIns="45720" wrap="square">
+            <a:noAutofit/>
+          </a:bodyPr>
+          <a:lstStyle/>
+          <a:p>
+            <a:pPr indent="0" lvl="0" marL="0" marR="0" rtl="0" algn="l">
+              <a:lnSpc>
+                <a:spcPct val="100000"/>
+              </a:lnSpc>
+              <a:spcBef>
+                <a:spcPts val="0"/>
+              </a:spcBef>
+              <a:spcAft>
+                <a:spcPts val="0"/>
+              </a:spcAft>
+              <a:buNone/>
+            </a:pPr>
+            <a:r>
+              <a:rPr b="0" i="0" lang="ko" sz="950" u="none" cap="none" strike="noStrike">
+                <a:solidFill>
+                  <a:srgbClr val="90A4AE"/>
+                </a:solidFill>
+                <a:latin typeface="Consolas"/>
+                <a:ea typeface="Consolas"/>
+                <a:cs typeface="Consolas"/>
+                <a:sym typeface="Consolas"/>
+              </a:rPr>
+              <a:t>Tech: LangGraph · ChromaDB · PyMuPDF · VLM Region Captioning · RAGAS · ADR 12건 · Claude Code loop</a:t>
+            </a:r>
+          </a:p>
+        </p:txBody>
+      </p:sp>
+    </p:spTree>
+  </p:cSld>
+  <p:clrMapOvr>
+    <a:masterClrMapping/>
+  </p:clrMapOvr>
+</p:sld>
+</file>
+
 <file path=ppt/slides/slide2.xml><?xml version="1.0" encoding="utf-8"?>
 <p:sld xmlns:a="http://schemas.openxmlformats.org/drawingml/2006/main" xmlns:r="http://schemas.openxmlformats.org/officeDocument/2006/relationships" xmlns:mc="http://schemas.openxmlformats.org/markup-compatibility/2006" xmlns:mv="urn:schemas-microsoft-com:mac:vml" xmlns:p="http://schemas.openxmlformats.org/presentationml/2006/main" xmlns:c="http://schemas.openxmlformats.org/drawingml/2006/chart" xmlns:dgm="http://schemas.openxmlformats.org/drawingml/2006/diagram" xmlns:o="urn:schemas-microsoft-com:office:office" xmlns:v="urn:schemas-microsoft-com:vml" xmlns:pvml="urn:schemas-microsoft-com:office:powerpoint" xmlns:com="http://schemas.openxmlformats.org/drawingml/2006/compatibility" xmlns:p14="http://schemas.microsoft.com/office/powerpoint/2010/main" xmlns:p15="http://schemas.microsoft.com/office/powerpoint/2012/main" xmlns:ahyp="http://schemas.microsoft.com/office/drawing/2018/hyperlinkcolor">
   <p:cSld>
@@ -7509,7 +9919,7 @@
         <p:spPr>
           <a:xfrm>
             <a:off x="457200" y="2141304"/>
-            <a:ext cx="1463100" cy="731400"/>
+            <a:ext cx="1143100" cy="731400"/>
           </a:xfrm>
           <a:prstGeom prst="rect">
             <a:avLst/>
@@ -7558,7 +9968,7 @@
         <p:spPr>
           <a:xfrm>
             <a:off x="457200" y="2141304"/>
-            <a:ext cx="1463100" cy="731400"/>
+            <a:ext cx="1143100" cy="731400"/>
           </a:xfrm>
           <a:prstGeom prst="rect">
             <a:avLst/>
@@ -7658,7 +10068,7 @@
         <p:spPr>
           <a:xfrm>
             <a:off x="457200" y="2964264"/>
-            <a:ext cx="1463100" cy="457200"/>
+            <a:ext cx="1143100" cy="457200"/>
           </a:xfrm>
           <a:prstGeom prst="rect">
             <a:avLst/>
@@ -7757,7 +10167,7 @@
         </p:nvSpPr>
         <p:spPr>
           <a:xfrm>
-            <a:off x="1920240" y="2141304"/>
+            <a:off x="1600300" y="2141304"/>
             <a:ext cx="274200" cy="731400"/>
           </a:xfrm>
           <a:prstGeom prst="rect">
@@ -7820,8 +10230,8 @@
         </p:nvSpPr>
         <p:spPr>
           <a:xfrm>
-            <a:off x="2194560" y="2141304"/>
-            <a:ext cx="1463100" cy="731400"/>
+            <a:off x="1874500" y="2141304"/>
+            <a:ext cx="1143100" cy="731400"/>
           </a:xfrm>
           <a:prstGeom prst="rect">
             <a:avLst/>
@@ -7869,8 +10279,8 @@
         </p:nvSpPr>
         <p:spPr>
           <a:xfrm>
-            <a:off x="2194560" y="2141304"/>
-            <a:ext cx="1463100" cy="731400"/>
+            <a:off x="1874500" y="2141304"/>
+            <a:ext cx="1143100" cy="731400"/>
           </a:xfrm>
           <a:prstGeom prst="rect">
             <a:avLst/>
@@ -7969,8 +10379,8 @@
         </p:nvSpPr>
         <p:spPr>
           <a:xfrm>
-            <a:off x="2194560" y="2964264"/>
-            <a:ext cx="1463100" cy="457200"/>
+            <a:off x="1874500" y="2964264"/>
+            <a:ext cx="1143100" cy="457200"/>
           </a:xfrm>
           <a:prstGeom prst="rect">
             <a:avLst/>
@@ -8063,13 +10473,13 @@
       </p:sp>
       <p:sp>
         <p:nvSpPr>
-          <p:cNvPr id="76" name="Google Shape;76;p15"/>
+          <p:cNvPr id="901" name="Google Shape;72;p15"/>
           <p:cNvSpPr/>
           <p:nvPr/>
         </p:nvSpPr>
         <p:spPr>
           <a:xfrm>
-            <a:off x="3657600" y="2141304"/>
+            <a:off x="3017600" y="2141304"/>
             <a:ext cx="274200" cy="731400"/>
           </a:xfrm>
           <a:prstGeom prst="rect">
@@ -8132,8 +10542,8 @@
         </p:nvSpPr>
         <p:spPr>
           <a:xfrm>
-            <a:off x="3931920" y="2141304"/>
-            <a:ext cx="1463100" cy="731400"/>
+            <a:off x="3291800" y="2141304"/>
+            <a:ext cx="1143100" cy="731400"/>
           </a:xfrm>
           <a:prstGeom prst="rect">
             <a:avLst/>
@@ -8181,8 +10591,8 @@
         </p:nvSpPr>
         <p:spPr>
           <a:xfrm>
-            <a:off x="3931920" y="2141304"/>
-            <a:ext cx="1463100" cy="731400"/>
+            <a:off x="3291800" y="2141304"/>
+            <a:ext cx="1143100" cy="731400"/>
           </a:xfrm>
           <a:prstGeom prst="rect">
             <a:avLst/>
@@ -8244,8 +10654,8 @@
         </p:nvSpPr>
         <p:spPr>
           <a:xfrm>
-            <a:off x="3931920" y="2964264"/>
-            <a:ext cx="1463100" cy="457200"/>
+            <a:off x="3291800" y="2964264"/>
+            <a:ext cx="1143100" cy="457200"/>
           </a:xfrm>
           <a:prstGeom prst="rect">
             <a:avLst/>
@@ -8346,13 +10756,13 @@
       </p:sp>
       <p:sp>
         <p:nvSpPr>
-          <p:cNvPr id="80" name="Google Shape;80;p15"/>
+          <p:cNvPr id="902" name="Google Shape;72;p15"/>
           <p:cNvSpPr/>
           <p:nvPr/>
         </p:nvSpPr>
         <p:spPr>
           <a:xfrm>
-            <a:off x="5394960" y="2141304"/>
+            <a:off x="4434900" y="2141304"/>
             <a:ext cx="274200" cy="731400"/>
           </a:xfrm>
           <a:prstGeom prst="rect">
@@ -8415,8 +10825,8 @@
         </p:nvSpPr>
         <p:spPr>
           <a:xfrm>
-            <a:off x="5669280" y="2141304"/>
-            <a:ext cx="1463100" cy="731400"/>
+            <a:off x="4709100" y="2141304"/>
+            <a:ext cx="1143100" cy="731400"/>
           </a:xfrm>
           <a:prstGeom prst="rect">
             <a:avLst/>
@@ -8464,8 +10874,8 @@
         </p:nvSpPr>
         <p:spPr>
           <a:xfrm>
-            <a:off x="5669280" y="2141304"/>
-            <a:ext cx="1463100" cy="731400"/>
+            <a:off x="4709100" y="2141304"/>
+            <a:ext cx="1143100" cy="731400"/>
           </a:xfrm>
           <a:prstGeom prst="rect">
             <a:avLst/>
@@ -8564,8 +10974,8 @@
         </p:nvSpPr>
         <p:spPr>
           <a:xfrm>
-            <a:off x="5669280" y="2964264"/>
-            <a:ext cx="1463100" cy="457200"/>
+            <a:off x="4709100" y="2964264"/>
+            <a:ext cx="1143100" cy="457200"/>
           </a:xfrm>
           <a:prstGeom prst="rect">
             <a:avLst/>
@@ -8658,13 +11068,13 @@
       </p:sp>
       <p:sp>
         <p:nvSpPr>
-          <p:cNvPr id="84" name="Google Shape;84;p15"/>
+          <p:cNvPr id="903" name="Google Shape;72;p15"/>
           <p:cNvSpPr/>
           <p:nvPr/>
         </p:nvSpPr>
         <p:spPr>
           <a:xfrm>
-            <a:off x="7132320" y="2141304"/>
+            <a:off x="5852200" y="2141304"/>
             <a:ext cx="274200" cy="731400"/>
           </a:xfrm>
           <a:prstGeom prst="rect">
@@ -8727,8 +11137,8 @@
         </p:nvSpPr>
         <p:spPr>
           <a:xfrm>
-            <a:off x="7406640" y="2141304"/>
-            <a:ext cx="1463100" cy="731400"/>
+            <a:off x="6126400" y="2141304"/>
+            <a:ext cx="1143100" cy="731400"/>
           </a:xfrm>
           <a:prstGeom prst="rect">
             <a:avLst/>
@@ -8776,8 +11186,8 @@
         </p:nvSpPr>
         <p:spPr>
           <a:xfrm>
-            <a:off x="7406640" y="2141304"/>
-            <a:ext cx="1463100" cy="731400"/>
+            <a:off x="6126400" y="2141304"/>
+            <a:ext cx="1143100" cy="731400"/>
           </a:xfrm>
           <a:prstGeom prst="rect">
             <a:avLst/>
@@ -8876,8 +11286,8 @@
         </p:nvSpPr>
         <p:spPr>
           <a:xfrm>
-            <a:off x="7406640" y="2964264"/>
-            <a:ext cx="1463100" cy="457200"/>
+            <a:off x="6126400" y="2964264"/>
+            <a:ext cx="1143100" cy="457200"/>
           </a:xfrm>
           <a:prstGeom prst="rect">
             <a:avLst/>
@@ -8955,6 +11365,289 @@
                 <a:sym typeface="Arial"/>
               </a:rPr>
               <a:t>도메인 적응</a:t>
+            </a:r>
+            <a:endParaRPr b="0" i="0" sz="800" u="none" cap="none" strike="noStrike">
+              <a:solidFill>
+                <a:schemeClr val="dk1"/>
+              </a:solidFill>
+              <a:latin typeface="Calibri"/>
+              <a:ea typeface="Calibri"/>
+              <a:cs typeface="Calibri"/>
+              <a:sym typeface="Calibri"/>
+            </a:endParaRPr>
+          </a:p>
+        </p:txBody>
+      </p:sp>
+      <p:sp>
+        <p:nvSpPr>
+          <p:cNvPr id="904" name="Google Shape;72;p15"/>
+          <p:cNvSpPr/>
+          <p:nvPr/>
+        </p:nvSpPr>
+        <p:spPr>
+          <a:xfrm>
+            <a:off x="7269500" y="2141304"/>
+            <a:ext cx="274200" cy="731400"/>
+          </a:xfrm>
+          <a:prstGeom prst="rect">
+            <a:avLst/>
+          </a:prstGeom>
+          <a:noFill/>
+          <a:ln>
+            <a:noFill/>
+          </a:ln>
+        </p:spPr>
+        <p:txBody>
+          <a:bodyPr anchorCtr="0" anchor="ctr" bIns="45700" lIns="91425" spcFirstLastPara="1" rIns="91425" wrap="square" tIns="45700">
+            <a:noAutofit/>
+          </a:bodyPr>
+          <a:lstStyle/>
+          <a:p>
+            <a:pPr indent="0" lvl="0" marL="0" marR="0" rtl="0" algn="ctr">
+              <a:spcBef>
+                <a:spcPts val="0"/>
+              </a:spcBef>
+              <a:spcAft>
+                <a:spcPts val="0"/>
+              </a:spcAft>
+              <a:buClr>
+                <a:srgbClr val="1565C0"/>
+              </a:buClr>
+              <a:buSzPts val="1600"/>
+              <a:buFont typeface="Calibri"/>
+              <a:buNone/>
+            </a:pPr>
+            <a:r>
+              <a:rPr b="0" i="0" lang="ko" sz="1600" u="none" cap="none" strike="noStrike">
+                <a:solidFill>
+                  <a:srgbClr val="1565C0"/>
+                </a:solidFill>
+                <a:latin typeface="Calibri"/>
+                <a:ea typeface="Calibri"/>
+                <a:cs typeface="Calibri"/>
+                <a:sym typeface="Calibri"/>
+              </a:rPr>
+              <a:t>→</a:t>
+            </a:r>
+            <a:endParaRPr b="0" i="0" sz="1600" u="none" cap="none" strike="noStrike">
+              <a:solidFill>
+                <a:schemeClr val="dk1"/>
+              </a:solidFill>
+              <a:latin typeface="Calibri"/>
+              <a:ea typeface="Calibri"/>
+              <a:cs typeface="Calibri"/>
+              <a:sym typeface="Calibri"/>
+            </a:endParaRPr>
+          </a:p>
+        </p:txBody>
+      </p:sp>
+      <p:sp>
+        <p:nvSpPr>
+          <p:cNvPr id="905" name="Google Shape;77;p15"/>
+          <p:cNvSpPr/>
+          <p:nvPr/>
+        </p:nvSpPr>
+        <p:spPr>
+          <a:xfrm>
+            <a:off x="7543700" y="2141304"/>
+            <a:ext cx="1143100" cy="731400"/>
+          </a:xfrm>
+          <a:prstGeom prst="rect">
+            <a:avLst/>
+          </a:prstGeom>
+          <a:solidFill>
+            <a:srgbClr val="FFFFFF"/>
+          </a:solidFill>
+          <a:ln cap="flat" cmpd="sng" w="19050">
+            <a:solidFill>
+              <a:srgbClr val="1565C0"/>
+            </a:solidFill>
+            <a:prstDash val="solid"/>
+            <a:round/>
+            <a:headEnd len="sm" w="sm" type="none"/>
+            <a:tailEnd len="sm" w="sm" type="none"/>
+          </a:ln>
+        </p:spPr>
+        <p:txBody>
+          <a:bodyPr anchorCtr="0" anchor="ctr" bIns="91425" lIns="91425" spcFirstLastPara="1" rIns="91425" wrap="square" tIns="91425">
+            <a:noAutofit/>
+          </a:bodyPr>
+          <a:lstStyle/>
+          <a:p>
+            <a:pPr indent="0" lvl="0" marL="0" rtl="0" algn="l">
+              <a:spcBef>
+                <a:spcPts val="0"/>
+              </a:spcBef>
+              <a:spcAft>
+                <a:spcPts val="0"/>
+              </a:spcAft>
+              <a:buNone/>
+            </a:pPr>
+            <a:r>
+              <a:t/>
+            </a:r>
+            <a:endParaRPr/>
+          </a:p>
+        </p:txBody>
+      </p:sp>
+      <p:sp>
+        <p:nvSpPr>
+          <p:cNvPr id="906" name="Google Shape;78;p15"/>
+          <p:cNvSpPr/>
+          <p:nvPr/>
+        </p:nvSpPr>
+        <p:spPr>
+          <a:xfrm>
+            <a:off x="7543700" y="2141304"/>
+            <a:ext cx="1143100" cy="731400"/>
+          </a:xfrm>
+          <a:prstGeom prst="rect">
+            <a:avLst/>
+          </a:prstGeom>
+          <a:noFill/>
+          <a:ln>
+            <a:noFill/>
+          </a:ln>
+        </p:spPr>
+        <p:txBody>
+          <a:bodyPr anchorCtr="0" anchor="ctr" bIns="0" lIns="0" spcFirstLastPara="1" rIns="0" wrap="square" tIns="0">
+            <a:noAutofit/>
+          </a:bodyPr>
+          <a:lstStyle/>
+          <a:p>
+            <a:pPr indent="0" lvl="0" marL="0" marR="0" rtl="0" algn="ctr">
+              <a:spcBef>
+                <a:spcPts val="0"/>
+              </a:spcBef>
+              <a:spcAft>
+                <a:spcPts val="0"/>
+              </a:spcAft>
+              <a:buClr>
+                <a:srgbClr val="212121"/>
+              </a:buClr>
+              <a:buSzPts val="1000"/>
+              <a:buFont typeface="Arial"/>
+              <a:buNone/>
+            </a:pPr>
+            <a:r>
+              <a:rPr b="1" i="0" lang="ko" sz="1000" u="none" cap="none" strike="noStrike">
+                <a:solidFill>
+                  <a:srgbClr val="212121"/>
+                </a:solidFill>
+                <a:latin typeface="Arial"/>
+                <a:ea typeface="Arial"/>
+                <a:cs typeface="Arial"/>
+                <a:sym typeface="Arial"/>
+              </a:rPr>
+              <a:t>Multimodal RAG</a:t>
+            </a:r>
+            <a:endParaRPr b="0" i="0" sz="1000" u="none" cap="none" strike="noStrike">
+              <a:solidFill>
+                <a:schemeClr val="dk1"/>
+              </a:solidFill>
+              <a:latin typeface="Calibri"/>
+              <a:ea typeface="Calibri"/>
+              <a:cs typeface="Calibri"/>
+              <a:sym typeface="Calibri"/>
+            </a:endParaRPr>
+          </a:p>
+        </p:txBody>
+      </p:sp>
+      <p:sp>
+        <p:nvSpPr>
+          <p:cNvPr id="907" name="Google Shape;79;p15"/>
+          <p:cNvSpPr/>
+          <p:nvPr/>
+        </p:nvSpPr>
+        <p:spPr>
+          <a:xfrm>
+            <a:off x="7543700" y="2964264"/>
+            <a:ext cx="1143100" cy="457200"/>
+          </a:xfrm>
+          <a:prstGeom prst="rect">
+            <a:avLst/>
+          </a:prstGeom>
+          <a:noFill/>
+          <a:ln>
+            <a:noFill/>
+          </a:ln>
+        </p:spPr>
+        <p:txBody>
+          <a:bodyPr anchorCtr="0" anchor="ctr" bIns="0" lIns="0" spcFirstLastPara="1" rIns="0" wrap="square" tIns="0">
+            <a:noAutofit/>
+          </a:bodyPr>
+          <a:lstStyle/>
+          <a:p>
+            <a:pPr indent="0" lvl="0" marL="0" marR="0" rtl="0" algn="ctr">
+              <a:spcBef>
+                <a:spcPts val="0"/>
+              </a:spcBef>
+              <a:spcAft>
+                <a:spcPts val="0"/>
+              </a:spcAft>
+              <a:buClr>
+                <a:srgbClr val="90A4AE"/>
+              </a:buClr>
+              <a:buSzPts val="800"/>
+              <a:buFont typeface="Arial"/>
+              <a:buNone/>
+            </a:pPr>
+            <a:r>
+              <a:rPr b="0" i="0" lang="ko" sz="800" u="none" cap="none" strike="noStrike">
+                <a:solidFill>
+                  <a:srgbClr val="90A4AE"/>
+                </a:solidFill>
+                <a:latin typeface="Arial"/>
+                <a:ea typeface="Arial"/>
+                <a:cs typeface="Arial"/>
+                <a:sym typeface="Arial"/>
+              </a:rPr>
+              <a:t>도면 캡션</a:t>
+            </a:r>
+            <a:r>
+              <a:rPr lang="ko" sz="800">
+                <a:solidFill>
+                  <a:srgbClr val="90A4AE"/>
+                </a:solidFill>
+              </a:rPr>
+              <a:t/>
+            </a:r>
+            <a:endParaRPr b="0" i="0" sz="800" u="none" cap="none" strike="noStrike">
+              <a:solidFill>
+                <a:schemeClr val="dk1"/>
+              </a:solidFill>
+              <a:latin typeface="Calibri"/>
+              <a:ea typeface="Calibri"/>
+              <a:cs typeface="Calibri"/>
+              <a:sym typeface="Calibri"/>
+            </a:endParaRPr>
+          </a:p>
+          <a:p>
+            <a:pPr indent="0" lvl="0" marL="0" marR="0" rtl="0" algn="ctr">
+              <a:spcBef>
+                <a:spcPts val="0"/>
+              </a:spcBef>
+              <a:spcAft>
+                <a:spcPts val="0"/>
+              </a:spcAft>
+              <a:buClr>
+                <a:srgbClr val="90A4AE"/>
+              </a:buClr>
+              <a:buSzPts val="800"/>
+              <a:buFont typeface="Arial"/>
+              <a:buNone/>
+            </a:pPr>
+            <a:r>
+              <a:rPr b="0" i="0" lang="ko" sz="800" u="none" cap="none" strike="noStrike">
+                <a:solidFill>
+                  <a:srgbClr val="90A4AE"/>
+                </a:solidFill>
+                <a:latin typeface="Arial"/>
+                <a:ea typeface="Arial"/>
+                <a:cs typeface="Arial"/>
+                <a:sym typeface="Arial"/>
+              </a:rPr>
+              <a:t>크로스모달</a:t>
             </a:r>
             <a:endParaRPr b="0" i="0" sz="800" u="none" cap="none" strike="noStrike">
               <a:solidFill>
@@ -10338,7 +13031,7 @@
                 <a:cs typeface="Calibri"/>
                 <a:sym typeface="Calibri"/>
               </a:rPr>
-              <a:t>동일 환경에서 계산 모델 학습·평가 (Phy-Q 벤치마크 기반 학습 환경 구축)  ·  슬라이드 3에서 상세</a:t>
+              <a:t>동일 환경에서 계산 모델 학습·평가 (Phy-Q 벤치마크 기반 학습 환경 구축)  ·  슬라이드 4에서 상세</a:t>
             </a:r>
             <a:endParaRPr b="0" i="0" sz="873" u="none" cap="none" strike="noStrike">
               <a:solidFill>
@@ -13939,7 +16632,7 @@
                   <a:schemeClr val="accent2"/>
                 </a:solidFill>
               </a:rPr>
-              <a:t>→ 뇌의 메커니즘을 더 잘 설명하는 Stable Preidctive Coding Network 고안 후 안정성 확인</a:t>
+              <a:t>→ 뇌의 메커니즘을 더 잘 설명하는 Stable Predictive Coding Network 고안 후 안정성 확인</a:t>
             </a:r>
             <a:endParaRPr sz="1100">
               <a:solidFill>
@@ -14459,7 +17152,7 @@
                 <a:cs typeface="Arial"/>
                 <a:sym typeface="Arial"/>
               </a:rPr>
-              <a:t>FastAPI 기반 서빙 아키텍처 구현</a:t>
+              <a:t>Main API 서버(Node.js) + 모델 추론 서버(FastAPI) 서빙 아키텍처 구현</a:t>
             </a:r>
             <a:endParaRPr b="0" i="0" sz="1100" u="none" cap="none" strike="noStrike">
               <a:solidFill>
@@ -18654,7 +21347,7 @@
                 <a:cs typeface="Arial"/>
                 <a:sym typeface="Arial"/>
               </a:rPr>
-              <a:t>AI사업팀 · 10개 서비스 대상 품질 평가 체계 설계·구축 중</a:t>
+              <a:t>AI사업팀 · 10개 서비스 대상 품질 평가 체계 설계·구축 · 운영망 실가동</a:t>
             </a:r>
             <a:endParaRPr b="0" i="0" sz="1300" u="none" cap="none" strike="noStrike">
               <a:solidFill>
@@ -19215,7 +21908,7 @@
                 <a:cs typeface="Arial"/>
                 <a:sym typeface="Arial"/>
               </a:rPr>
-              <a:t>DeepEval · SLLM</a:t>
+              <a:t>Custom Judge · SLLM</a:t>
             </a:r>
             <a:endParaRPr b="0" i="0" sz="900" u="none" cap="none" strike="noStrike">
               <a:solidFill>
@@ -20850,7 +23543,7 @@
                 <a:cs typeface="Consolas"/>
                 <a:sym typeface="Consolas"/>
               </a:rPr>
-              <a:t>Tech: Python · DeepEval · SLLM · Batch Processing · Human-in-the-loop Evaluation</a:t>
+              <a:t>Tech: Python · FastAPI · vLLM(SLLM) · Batch Processing · Human-in-the-loop Evaluation</a:t>
             </a:r>
             <a:endParaRPr b="0" i="0" sz="1000" u="none" cap="none" strike="noStrike">
               <a:solidFill>

--- a/data/포트폴리오_조영하.pptx
+++ b/data/포트폴리오_조영하.pptx
@@ -19159,7 +19159,7 @@
                 <a:cs typeface="Arial"/>
                 <a:sym typeface="Arial"/>
               </a:rPr>
-              <a:t>AI 사업팀 · LangGraph 기반 멀티에이전트 워크플로우</a:t>
+              <a:t>AI 플랫폼사업팀 · LangGraph 기반 멀티에이전트 워크플로우</a:t>
             </a:r>
             <a:endParaRPr b="0" i="0" sz="1300" u="none" cap="none" strike="noStrike">
               <a:solidFill>
@@ -21347,7 +21347,7 @@
                 <a:cs typeface="Arial"/>
                 <a:sym typeface="Arial"/>
               </a:rPr>
-              <a:t>AI사업팀 · 10개 서비스 대상 품질 평가 체계 설계·구축 · 운영망 실가동</a:t>
+              <a:t>AI 플랫폼사업팀 · 10개 서비스 대상 품질 평가 체계 설계·구축 · 운영망 실가동</a:t>
             </a:r>
             <a:endParaRPr b="0" i="0" sz="1300" u="none" cap="none" strike="noStrike">
               <a:solidFill>
